--- a/年会AI战略页_2026.pptx
+++ b/年会AI战略页_2026.pptx
@@ -3120,8 +3120,8 @@
         </p:nvSpPr>
         <p:spPr>
           <a:xfrm>
-            <a:off x="3017520" y="118872"/>
-            <a:ext cx="5806440" cy="365760"/>
+            <a:off x="2377440" y="274320"/>
+            <a:ext cx="6419088" cy="365760"/>
           </a:xfrm>
           <a:prstGeom prst="rect">
             <a:avLst/>
@@ -3129,18 +3129,18 @@
           <a:noFill/>
         </p:spPr>
         <p:txBody>
-          <a:bodyPr wrap="square" lIns="0" rIns="0" tIns="0" bIns="0">
+          <a:bodyPr wrap="square" lIns="0" rIns="0" tIns="0" bIns="0" anchor="ctr">
             <a:spAutoFit/>
           </a:bodyPr>
           <a:lstStyle/>
           <a:p>
             <a:pPr algn="r">
               <a:lnSpc>
-                <a:spcPct val="115000"/>
+                <a:spcPct val="112000"/>
               </a:lnSpc>
             </a:pPr>
             <a:r>
-              <a:rPr sz="1800" b="1">
+              <a:rPr sz="1900" b="1">
                 <a:solidFill>
                   <a:srgbClr val="00366A"/>
                 </a:solidFill>
@@ -3161,8 +3161,8 @@
         </p:nvSpPr>
         <p:spPr>
           <a:xfrm>
-            <a:off x="347472" y="768096"/>
-            <a:ext cx="8449056" cy="402336"/>
+            <a:off x="347472" y="822960"/>
+            <a:ext cx="8449055" cy="384048"/>
           </a:xfrm>
           <a:prstGeom prst="rect">
             <a:avLst/>
@@ -3213,8 +3213,8 @@
         </p:nvSpPr>
         <p:spPr>
           <a:xfrm>
-            <a:off x="566928" y="841248"/>
-            <a:ext cx="5669280" cy="256032"/>
+            <a:off x="566928" y="891540"/>
+            <a:ext cx="5852160" cy="246888"/>
           </a:xfrm>
           <a:prstGeom prst="rect">
             <a:avLst/>
@@ -3229,11 +3229,11 @@
           <a:p>
             <a:pPr algn="l">
               <a:lnSpc>
-                <a:spcPct val="115000"/>
+                <a:spcPct val="112000"/>
               </a:lnSpc>
             </a:pPr>
             <a:r>
-              <a:rPr sz="1300" b="1">
+              <a:rPr sz="1250" b="1">
                 <a:solidFill>
                   <a:srgbClr val="FFFFFF"/>
                 </a:solidFill>
@@ -3241,7 +3241,7 @@
                 <a:ea typeface="微软雅黑"/>
                 <a:cs typeface="微软雅黑"/>
               </a:rPr>
-              <a:t>数据筑基  →  场景验证  →  组合赋能  →  生产力重塑</a:t>
+              <a:t>数据筑基   →   场景验证   →   组合赋能   →   生产力重塑</a:t>
             </a:r>
           </a:p>
         </p:txBody>
@@ -3254,8 +3254,8 @@
         </p:nvSpPr>
         <p:spPr>
           <a:xfrm>
-            <a:off x="6309360" y="859536"/>
-            <a:ext cx="2286000" cy="237744"/>
+            <a:off x="6327647" y="914400"/>
+            <a:ext cx="2249424" cy="201168"/>
           </a:xfrm>
           <a:prstGeom prst="rect">
             <a:avLst/>
@@ -3270,11 +3270,11 @@
           <a:p>
             <a:pPr algn="r">
               <a:lnSpc>
-                <a:spcPct val="115000"/>
+                <a:spcPct val="112000"/>
               </a:lnSpc>
             </a:pPr>
             <a:r>
-              <a:rPr sz="800" b="1">
+              <a:rPr sz="750" b="1">
                 <a:solidFill>
                   <a:srgbClr val="9EC2EC"/>
                 </a:solidFill>
@@ -3295,8 +3295,8 @@
         </p:nvSpPr>
         <p:spPr>
           <a:xfrm>
-            <a:off x="347472" y="1298448"/>
-            <a:ext cx="4846320" cy="731520"/>
+            <a:off x="347472" y="1335024"/>
+            <a:ext cx="8449055" cy="420624"/>
           </a:xfrm>
           <a:prstGeom prst="rect">
             <a:avLst/>
@@ -3307,7 +3307,7 @@
                 <a:srgbClr val="FF7E3D"/>
               </a:gs>
               <a:gs pos="100000">
-                <a:srgbClr val="FFA872"/>
+                <a:srgbClr val="FFB184"/>
               </a:gs>
             </a:gsLst>
             <a:lin ang="0" scaled="0"/>
@@ -3347,8 +3347,8 @@
         </p:nvSpPr>
         <p:spPr>
           <a:xfrm>
-            <a:off x="347472" y="1298448"/>
-            <a:ext cx="548640" cy="731520"/>
+            <a:off x="347472" y="1335024"/>
+            <a:ext cx="512064" cy="420624"/>
           </a:xfrm>
           <a:prstGeom prst="rect">
             <a:avLst/>
@@ -3391,8 +3391,8 @@
         </p:nvSpPr>
         <p:spPr>
           <a:xfrm>
-            <a:off x="347472" y="1435607"/>
-            <a:ext cx="548640" cy="274320"/>
+            <a:off x="347472" y="1385316"/>
+            <a:ext cx="512064" cy="219456"/>
           </a:xfrm>
           <a:prstGeom prst="rect">
             <a:avLst/>
@@ -3407,11 +3407,11 @@
           <a:p>
             <a:pPr algn="ctr">
               <a:lnSpc>
-                <a:spcPct val="115000"/>
+                <a:spcPct val="112000"/>
               </a:lnSpc>
             </a:pPr>
             <a:r>
-              <a:rPr sz="1700" b="1">
+              <a:rPr sz="1500" b="1">
                 <a:solidFill>
                   <a:srgbClr val="FF7E3D"/>
                 </a:solidFill>
@@ -3432,8 +3432,8 @@
         </p:nvSpPr>
         <p:spPr>
           <a:xfrm>
-            <a:off x="347472" y="1755648"/>
-            <a:ext cx="548640" cy="164592"/>
+            <a:off x="347472" y="1600200"/>
+            <a:ext cx="512064" cy="128016"/>
           </a:xfrm>
           <a:prstGeom prst="rect">
             <a:avLst/>
@@ -3448,13 +3448,13 @@
           <a:p>
             <a:pPr algn="ctr">
               <a:lnSpc>
-                <a:spcPct val="115000"/>
+                <a:spcPct val="112000"/>
               </a:lnSpc>
             </a:pPr>
             <a:r>
-              <a:rPr sz="550" b="1">
+              <a:rPr sz="500" b="1">
                 <a:solidFill>
-                  <a:srgbClr val="6B7A90"/>
+                  <a:srgbClr val="606E84"/>
                 </a:solidFill>
                 <a:latin typeface="Arial"/>
                 <a:ea typeface="微软雅黑"/>
@@ -3473,8 +3473,8 @@
         </p:nvSpPr>
         <p:spPr>
           <a:xfrm>
-            <a:off x="1024128" y="1389888"/>
-            <a:ext cx="1417320" cy="237744"/>
+            <a:off x="987552" y="1385316"/>
+            <a:ext cx="1828800" cy="219456"/>
           </a:xfrm>
           <a:prstGeom prst="rect">
             <a:avLst/>
@@ -3482,14 +3482,14 @@
           <a:noFill/>
         </p:spPr>
         <p:txBody>
-          <a:bodyPr wrap="square" lIns="0" rIns="0" tIns="0" bIns="0">
+          <a:bodyPr wrap="square" lIns="0" rIns="0" tIns="0" bIns="0" anchor="ctr">
             <a:spAutoFit/>
           </a:bodyPr>
           <a:lstStyle/>
           <a:p>
             <a:pPr algn="l">
               <a:lnSpc>
-                <a:spcPct val="115000"/>
+                <a:spcPct val="112000"/>
               </a:lnSpc>
             </a:pPr>
             <a:r>
@@ -3514,8 +3514,8 @@
         </p:nvSpPr>
         <p:spPr>
           <a:xfrm>
-            <a:off x="2505456" y="1408176"/>
-            <a:ext cx="2606040" cy="201168"/>
+            <a:off x="2633472" y="1403604"/>
+            <a:ext cx="2926080" cy="201168"/>
           </a:xfrm>
           <a:prstGeom prst="rect">
             <a:avLst/>
@@ -3530,13 +3530,13 @@
           <a:p>
             <a:pPr algn="l">
               <a:lnSpc>
-                <a:spcPct val="115000"/>
+                <a:spcPct val="112000"/>
               </a:lnSpc>
             </a:pPr>
             <a:r>
-              <a:rPr sz="800" b="1">
+              <a:rPr sz="900" b="1">
                 <a:solidFill>
-                  <a:srgbClr val="E4EEFB"/>
+                  <a:srgbClr val="FFF2EA"/>
                 </a:solidFill>
                 <a:latin typeface="微软雅黑"/>
                 <a:ea typeface="微软雅黑"/>
@@ -3555,8 +3555,8 @@
         </p:nvSpPr>
         <p:spPr>
           <a:xfrm>
-            <a:off x="1024128" y="1719072"/>
-            <a:ext cx="4041648" cy="256032"/>
+            <a:off x="987552" y="1586484"/>
+            <a:ext cx="7315200" cy="164592"/>
           </a:xfrm>
           <a:prstGeom prst="rect">
             <a:avLst/>
@@ -3571,33 +3571,165 @@
           <a:p>
             <a:pPr algn="l">
               <a:lnSpc>
-                <a:spcPct val="115000"/>
+                <a:spcPct val="112000"/>
               </a:lnSpc>
             </a:pPr>
             <a:r>
-              <a:rPr sz="780" b="0">
+              <a:rPr sz="800" b="0">
                 <a:solidFill>
-                  <a:srgbClr val="CFDEF4"/>
+                  <a:srgbClr val="FFECE0"/>
                 </a:solidFill>
                 <a:latin typeface="微软雅黑"/>
                 <a:ea typeface="微软雅黑"/>
                 <a:cs typeface="微软雅黑"/>
               </a:rPr>
-              <a:t>人机协同新分工  ·  决策链路自动化  ·  组织能力升级</a:t>
-            </a:r>
-          </a:p>
-        </p:txBody>
-      </p:sp>
-      <p:sp>
-        <p:nvSpPr>
-          <p:cNvPr id="14" name="Rectangle 13"/>
+              <a:t>人机协同新分工   ·   决策链路自动化   ·   知识资产可复用   ·   组织能力升级</a:t>
+            </a:r>
+          </a:p>
+        </p:txBody>
+      </p:sp>
+      <p:sp>
+        <p:nvSpPr>
+          <p:cNvPr id="14" name="Isosceles Triangle 13"/>
           <p:cNvSpPr/>
           <p:nvPr/>
         </p:nvSpPr>
         <p:spPr>
           <a:xfrm>
-            <a:off x="347472" y="2103120"/>
-            <a:ext cx="4846320" cy="731520"/>
+            <a:off x="2084831" y="1796795"/>
+            <a:ext cx="100584" cy="68580"/>
+          </a:xfrm>
+          <a:prstGeom prst="triangle">
+            <a:avLst/>
+          </a:prstGeom>
+          <a:solidFill>
+            <a:srgbClr val="B4C7E4"/>
+          </a:solidFill>
+          <a:ln>
+            <a:noFill/>
+          </a:ln>
+          <a:effectLst/>
+        </p:spPr>
+        <p:style>
+          <a:lnRef idx="1">
+            <a:schemeClr val="accent1"/>
+          </a:lnRef>
+          <a:fillRef idx="3">
+            <a:schemeClr val="accent1"/>
+          </a:fillRef>
+          <a:effectRef idx="2">
+            <a:schemeClr val="accent1"/>
+          </a:effectRef>
+          <a:fontRef idx="minor">
+            <a:schemeClr val="lt1"/>
+          </a:fontRef>
+        </p:style>
+        <p:txBody>
+          <a:bodyPr rtlCol="0" anchor="ctr"/>
+          <a:lstStyle/>
+          <a:p>
+            <a:pPr algn="ctr"/>
+          </a:p>
+        </p:txBody>
+      </p:sp>
+      <p:sp>
+        <p:nvSpPr>
+          <p:cNvPr id="15" name="Isosceles Triangle 14"/>
+          <p:cNvSpPr/>
+          <p:nvPr/>
+        </p:nvSpPr>
+        <p:spPr>
+          <a:xfrm>
+            <a:off x="4462272" y="1796795"/>
+            <a:ext cx="100584" cy="68580"/>
+          </a:xfrm>
+          <a:prstGeom prst="triangle">
+            <a:avLst/>
+          </a:prstGeom>
+          <a:solidFill>
+            <a:srgbClr val="B4C7E4"/>
+          </a:solidFill>
+          <a:ln>
+            <a:noFill/>
+          </a:ln>
+          <a:effectLst/>
+        </p:spPr>
+        <p:style>
+          <a:lnRef idx="1">
+            <a:schemeClr val="accent1"/>
+          </a:lnRef>
+          <a:fillRef idx="3">
+            <a:schemeClr val="accent1"/>
+          </a:fillRef>
+          <a:effectRef idx="2">
+            <a:schemeClr val="accent1"/>
+          </a:effectRef>
+          <a:fontRef idx="minor">
+            <a:schemeClr val="lt1"/>
+          </a:fontRef>
+        </p:style>
+        <p:txBody>
+          <a:bodyPr rtlCol="0" anchor="ctr"/>
+          <a:lstStyle/>
+          <a:p>
+            <a:pPr algn="ctr"/>
+          </a:p>
+        </p:txBody>
+      </p:sp>
+      <p:sp>
+        <p:nvSpPr>
+          <p:cNvPr id="16" name="Isosceles Triangle 15"/>
+          <p:cNvSpPr/>
+          <p:nvPr/>
+        </p:nvSpPr>
+        <p:spPr>
+          <a:xfrm>
+            <a:off x="6839712" y="1796795"/>
+            <a:ext cx="100584" cy="68580"/>
+          </a:xfrm>
+          <a:prstGeom prst="triangle">
+            <a:avLst/>
+          </a:prstGeom>
+          <a:solidFill>
+            <a:srgbClr val="B4C7E4"/>
+          </a:solidFill>
+          <a:ln>
+            <a:noFill/>
+          </a:ln>
+          <a:effectLst/>
+        </p:spPr>
+        <p:style>
+          <a:lnRef idx="1">
+            <a:schemeClr val="accent1"/>
+          </a:lnRef>
+          <a:fillRef idx="3">
+            <a:schemeClr val="accent1"/>
+          </a:fillRef>
+          <a:effectRef idx="2">
+            <a:schemeClr val="accent1"/>
+          </a:effectRef>
+          <a:fontRef idx="minor">
+            <a:schemeClr val="lt1"/>
+          </a:fontRef>
+        </p:style>
+        <p:txBody>
+          <a:bodyPr rtlCol="0" anchor="ctr"/>
+          <a:lstStyle/>
+          <a:p>
+            <a:pPr algn="ctr"/>
+          </a:p>
+        </p:txBody>
+      </p:sp>
+      <p:sp>
+        <p:nvSpPr>
+          <p:cNvPr id="17" name="Rectangle 16"/>
+          <p:cNvSpPr/>
+          <p:nvPr/>
+        </p:nvSpPr>
+        <p:spPr>
+          <a:xfrm>
+            <a:off x="347472" y="1920240"/>
+            <a:ext cx="8449055" cy="274320"/>
           </a:xfrm>
           <a:prstGeom prst="rect">
             <a:avLst/>
@@ -3605,10 +3737,10 @@
           <a:gradFill rotWithShape="1">
             <a:gsLst>
               <a:gs pos="0">
-                <a:srgbClr val="2E5FA0"/>
+                <a:srgbClr val="00366A"/>
               </a:gs>
               <a:gs pos="100000">
-                <a:srgbClr val="5B8FD4"/>
+                <a:srgbClr val="4A7CBF"/>
               </a:gs>
             </a:gsLst>
             <a:lin ang="0" scaled="0"/>
@@ -3642,14 +3774,14 @@
       </p:sp>
       <p:sp>
         <p:nvSpPr>
-          <p:cNvPr id="15" name="Rectangle 14"/>
+          <p:cNvPr id="18" name="Rectangle 17"/>
           <p:cNvSpPr/>
           <p:nvPr/>
         </p:nvSpPr>
         <p:spPr>
           <a:xfrm>
-            <a:off x="347472" y="2103120"/>
-            <a:ext cx="548640" cy="731520"/>
+            <a:off x="347472" y="1920240"/>
+            <a:ext cx="512064" cy="274320"/>
           </a:xfrm>
           <a:prstGeom prst="rect">
             <a:avLst/>
@@ -3686,14 +3818,14 @@
       </p:sp>
       <p:sp>
         <p:nvSpPr>
-          <p:cNvPr id="16" name="TextBox 15"/>
+          <p:cNvPr id="19" name="TextBox 18"/>
           <p:cNvSpPr txBox="1"/>
           <p:nvPr/>
         </p:nvSpPr>
         <p:spPr>
           <a:xfrm>
-            <a:off x="347472" y="2240279"/>
-            <a:ext cx="548640" cy="274320"/>
+            <a:off x="347472" y="1943100"/>
+            <a:ext cx="512064" cy="182880"/>
           </a:xfrm>
           <a:prstGeom prst="rect">
             <a:avLst/>
@@ -3708,11 +3840,11 @@
           <a:p>
             <a:pPr algn="ctr">
               <a:lnSpc>
-                <a:spcPct val="115000"/>
+                <a:spcPct val="112000"/>
               </a:lnSpc>
             </a:pPr>
             <a:r>
-              <a:rPr sz="1700" b="1">
+              <a:rPr sz="1300" b="1">
                 <a:solidFill>
                   <a:srgbClr val="2E5FA0"/>
                 </a:solidFill>
@@ -3727,14 +3859,14 @@
       </p:sp>
       <p:sp>
         <p:nvSpPr>
-          <p:cNvPr id="17" name="TextBox 16"/>
+          <p:cNvPr id="20" name="TextBox 19"/>
           <p:cNvSpPr txBox="1"/>
           <p:nvPr/>
         </p:nvSpPr>
         <p:spPr>
           <a:xfrm>
-            <a:off x="347472" y="2560320"/>
-            <a:ext cx="548640" cy="164592"/>
+            <a:off x="987552" y="1961388"/>
+            <a:ext cx="2011680" cy="201168"/>
           </a:xfrm>
           <a:prstGeom prst="rect">
             <a:avLst/>
@@ -3747,54 +3879,13 @@
           </a:bodyPr>
           <a:lstStyle/>
           <a:p>
-            <a:pPr algn="ctr">
+            <a:pPr algn="l">
               <a:lnSpc>
-                <a:spcPct val="115000"/>
+                <a:spcPct val="112000"/>
               </a:lnSpc>
             </a:pPr>
             <a:r>
-              <a:rPr sz="550" b="1">
-                <a:solidFill>
-                  <a:srgbClr val="6B7A90"/>
-                </a:solidFill>
-                <a:latin typeface="Arial"/>
-                <a:ea typeface="微软雅黑"/>
-                <a:cs typeface="微软雅黑"/>
-              </a:rPr>
-              <a:t>SCENARIO</a:t>
-            </a:r>
-          </a:p>
-        </p:txBody>
-      </p:sp>
-      <p:sp>
-        <p:nvSpPr>
-          <p:cNvPr id="18" name="TextBox 17"/>
-          <p:cNvSpPr txBox="1"/>
-          <p:nvPr/>
-        </p:nvSpPr>
-        <p:spPr>
-          <a:xfrm>
-            <a:off x="1024128" y="2194560"/>
-            <a:ext cx="1417320" cy="237744"/>
-          </a:xfrm>
-          <a:prstGeom prst="rect">
-            <a:avLst/>
-          </a:prstGeom>
-          <a:noFill/>
-        </p:spPr>
-        <p:txBody>
-          <a:bodyPr wrap="square" lIns="0" rIns="0" tIns="0" bIns="0">
-            <a:spAutoFit/>
-          </a:bodyPr>
-          <a:lstStyle/>
-          <a:p>
-            <a:pPr algn="l">
-              <a:lnSpc>
-                <a:spcPct val="115000"/>
-              </a:lnSpc>
-            </a:pPr>
-            <a:r>
-              <a:rPr sz="1200" b="1">
+              <a:rPr sz="1150" b="1">
                 <a:solidFill>
                   <a:srgbClr val="FFFFFF"/>
                 </a:solidFill>
@@ -3802,21 +3893,21 @@
                 <a:ea typeface="微软雅黑"/>
                 <a:cs typeface="微软雅黑"/>
               </a:rPr>
-              <a:t>六大场景</a:t>
-            </a:r>
-          </a:p>
-        </p:txBody>
-      </p:sp>
-      <p:sp>
-        <p:nvSpPr>
-          <p:cNvPr id="19" name="TextBox 18"/>
+              <a:t>六大 AI 应用场景</a:t>
+            </a:r>
+          </a:p>
+        </p:txBody>
+      </p:sp>
+      <p:sp>
+        <p:nvSpPr>
+          <p:cNvPr id="21" name="TextBox 20"/>
           <p:cNvSpPr txBox="1"/>
           <p:nvPr/>
         </p:nvSpPr>
         <p:spPr>
           <a:xfrm>
-            <a:off x="2505456" y="2212848"/>
-            <a:ext cx="2606040" cy="201168"/>
+            <a:off x="3136391" y="1975104"/>
+            <a:ext cx="5394960" cy="182880"/>
           </a:xfrm>
           <a:prstGeom prst="rect">
             <a:avLst/>
@@ -3831,11 +3922,11 @@
           <a:p>
             <a:pPr algn="l">
               <a:lnSpc>
-                <a:spcPct val="115000"/>
+                <a:spcPct val="112000"/>
               </a:lnSpc>
             </a:pPr>
             <a:r>
-              <a:rPr sz="750" b="0">
+              <a:rPr sz="780" b="0">
                 <a:solidFill>
                   <a:srgbClr val="E4EEFB"/>
                 </a:solidFill>
@@ -3843,29 +3934,73 @@
                 <a:ea typeface="微软雅黑"/>
                 <a:cs typeface="微软雅黑"/>
               </a:rPr>
-              <a:t>短周期方向先出实证，强监管方向长期布局</a:t>
-            </a:r>
-          </a:p>
-        </p:txBody>
-      </p:sp>
-      <p:sp>
-        <p:nvSpPr>
-          <p:cNvPr id="20" name="Rounded Rectangle 19"/>
+              <a:t>短周期方向先出实证，强监管方向长期布局   ·   逐项形成落地方案，可独立立项、可组合推进</a:t>
+            </a:r>
+          </a:p>
+        </p:txBody>
+      </p:sp>
+      <p:sp>
+        <p:nvSpPr>
+          <p:cNvPr id="22" name="Rectangle 21"/>
           <p:cNvSpPr/>
           <p:nvPr/>
         </p:nvSpPr>
         <p:spPr>
           <a:xfrm>
-            <a:off x="1042416" y="2468879"/>
-            <a:ext cx="694944" cy="192024"/>
-          </a:xfrm>
-          <a:prstGeom prst="roundRect">
-            <a:avLst>
-              <a:gd name="adj" fmla="val 28000"/>
-            </a:avLst>
+            <a:off x="347472" y="2267712"/>
+            <a:ext cx="1351025" cy="1188720"/>
+          </a:xfrm>
+          <a:prstGeom prst="rect">
+            <a:avLst/>
           </a:prstGeom>
           <a:solidFill>
             <a:srgbClr val="FFFFFF"/>
+          </a:solidFill>
+          <a:ln w="9525">
+            <a:solidFill>
+              <a:srgbClr val="D8E1EF"/>
+            </a:solidFill>
+          </a:ln>
+          <a:effectLst/>
+        </p:spPr>
+        <p:style>
+          <a:lnRef idx="1">
+            <a:schemeClr val="accent1"/>
+          </a:lnRef>
+          <a:fillRef idx="3">
+            <a:schemeClr val="accent1"/>
+          </a:fillRef>
+          <a:effectRef idx="2">
+            <a:schemeClr val="accent1"/>
+          </a:effectRef>
+          <a:fontRef idx="minor">
+            <a:schemeClr val="lt1"/>
+          </a:fontRef>
+        </p:style>
+        <p:txBody>
+          <a:bodyPr rtlCol="0" anchor="ctr"/>
+          <a:lstStyle/>
+          <a:p>
+            <a:pPr algn="ctr"/>
+          </a:p>
+        </p:txBody>
+      </p:sp>
+      <p:sp>
+        <p:nvSpPr>
+          <p:cNvPr id="23" name="Rectangle 22"/>
+          <p:cNvSpPr/>
+          <p:nvPr/>
+        </p:nvSpPr>
+        <p:spPr>
+          <a:xfrm>
+            <a:off x="347472" y="2267712"/>
+            <a:ext cx="1351025" cy="41148"/>
+          </a:xfrm>
+          <a:prstGeom prst="rect">
+            <a:avLst/>
+          </a:prstGeom>
+          <a:solidFill>
+            <a:srgbClr val="00366A"/>
           </a:solidFill>
           <a:ln>
             <a:noFill/>
@@ -3896,14 +4031,58 @@
       </p:sp>
       <p:sp>
         <p:nvSpPr>
-          <p:cNvPr id="21" name="TextBox 20"/>
+          <p:cNvPr id="24" name="Oval 23"/>
+          <p:cNvSpPr/>
+          <p:nvPr/>
+        </p:nvSpPr>
+        <p:spPr>
+          <a:xfrm>
+            <a:off x="899540" y="2372868"/>
+            <a:ext cx="246888" cy="246888"/>
+          </a:xfrm>
+          <a:prstGeom prst="ellipse">
+            <a:avLst/>
+          </a:prstGeom>
+          <a:solidFill>
+            <a:srgbClr val="00366A"/>
+          </a:solidFill>
+          <a:ln>
+            <a:noFill/>
+          </a:ln>
+          <a:effectLst/>
+        </p:spPr>
+        <p:style>
+          <a:lnRef idx="1">
+            <a:schemeClr val="accent1"/>
+          </a:lnRef>
+          <a:fillRef idx="3">
+            <a:schemeClr val="accent1"/>
+          </a:fillRef>
+          <a:effectRef idx="2">
+            <a:schemeClr val="accent1"/>
+          </a:effectRef>
+          <a:fontRef idx="minor">
+            <a:schemeClr val="lt1"/>
+          </a:fontRef>
+        </p:style>
+        <p:txBody>
+          <a:bodyPr rtlCol="0" anchor="ctr"/>
+          <a:lstStyle/>
+          <a:p>
+            <a:pPr algn="ctr"/>
+          </a:p>
+        </p:txBody>
+      </p:sp>
+      <p:sp>
+        <p:nvSpPr>
+          <p:cNvPr id="25" name="TextBox 24"/>
           <p:cNvSpPr txBox="1"/>
           <p:nvPr/>
         </p:nvSpPr>
         <p:spPr>
           <a:xfrm>
-            <a:off x="1042416" y="2494483"/>
-            <a:ext cx="694944" cy="155448"/>
+            <a:off x="899540" y="2416759"/>
+            <a:ext cx="246888" cy="155448"/>
           </a:xfrm>
           <a:prstGeom prst="rect">
             <a:avLst/>
@@ -3918,13 +4097,54 @@
           <a:p>
             <a:pPr algn="ctr">
               <a:lnSpc>
-                <a:spcPct val="115000"/>
+                <a:spcPct val="112000"/>
               </a:lnSpc>
             </a:pPr>
             <a:r>
-              <a:rPr sz="750" b="1">
+              <a:rPr sz="800" b="1">
                 <a:solidFill>
-                  <a:srgbClr val="2E5FA0"/>
+                  <a:srgbClr val="FFFFFF"/>
+                </a:solidFill>
+                <a:latin typeface="Arial"/>
+                <a:ea typeface="微软雅黑"/>
+                <a:cs typeface="微软雅黑"/>
+              </a:rPr>
+              <a:t>01</a:t>
+            </a:r>
+          </a:p>
+        </p:txBody>
+      </p:sp>
+      <p:sp>
+        <p:nvSpPr>
+          <p:cNvPr id="26" name="TextBox 25"/>
+          <p:cNvSpPr txBox="1"/>
+          <p:nvPr/>
+        </p:nvSpPr>
+        <p:spPr>
+          <a:xfrm>
+            <a:off x="393192" y="2656332"/>
+            <a:ext cx="1259585" cy="219456"/>
+          </a:xfrm>
+          <a:prstGeom prst="rect">
+            <a:avLst/>
+          </a:prstGeom>
+          <a:noFill/>
+        </p:spPr>
+        <p:txBody>
+          <a:bodyPr wrap="square" lIns="0" rIns="0" tIns="0" bIns="0">
+            <a:spAutoFit/>
+          </a:bodyPr>
+          <a:lstStyle/>
+          <a:p>
+            <a:pPr algn="ctr">
+              <a:lnSpc>
+                <a:spcPct val="112000"/>
+              </a:lnSpc>
+            </a:pPr>
+            <a:r>
+              <a:rPr sz="1100" b="1">
+                <a:solidFill>
+                  <a:srgbClr val="00366A"/>
                 </a:solidFill>
                 <a:latin typeface="微软雅黑"/>
                 <a:ea typeface="微软雅黑"/>
@@ -3937,22 +4157,20 @@
       </p:sp>
       <p:sp>
         <p:nvSpPr>
-          <p:cNvPr id="22" name="Rounded Rectangle 21"/>
+          <p:cNvPr id="27" name="Rectangle 26"/>
           <p:cNvSpPr/>
           <p:nvPr/>
         </p:nvSpPr>
         <p:spPr>
           <a:xfrm>
-            <a:off x="1787652" y="2468879"/>
-            <a:ext cx="694944" cy="192024"/>
-          </a:xfrm>
-          <a:prstGeom prst="roundRect">
-            <a:avLst>
-              <a:gd name="adj" fmla="val 28000"/>
-            </a:avLst>
+            <a:off x="867536" y="2894076"/>
+            <a:ext cx="310896" cy="18288"/>
+          </a:xfrm>
+          <a:prstGeom prst="rect">
+            <a:avLst/>
           </a:prstGeom>
           <a:solidFill>
-            <a:srgbClr val="FFFFFF"/>
+            <a:srgbClr val="D8E1EF"/>
           </a:solidFill>
           <a:ln>
             <a:noFill/>
@@ -3983,14 +4201,14 @@
       </p:sp>
       <p:sp>
         <p:nvSpPr>
-          <p:cNvPr id="23" name="TextBox 22"/>
+          <p:cNvPr id="28" name="TextBox 27"/>
           <p:cNvSpPr txBox="1"/>
           <p:nvPr/>
         </p:nvSpPr>
         <p:spPr>
           <a:xfrm>
-            <a:off x="1787652" y="2494483"/>
-            <a:ext cx="694944" cy="155448"/>
+            <a:off x="411480" y="2958084"/>
+            <a:ext cx="1223010" cy="310896"/>
           </a:xfrm>
           <a:prstGeom prst="rect">
             <a:avLst/>
@@ -4005,13 +4223,340 @@
           <a:p>
             <a:pPr algn="ctr">
               <a:lnSpc>
-                <a:spcPct val="115000"/>
+                <a:spcPct val="116000"/>
+              </a:lnSpc>
+              <a:spcAft>
+                <a:spcPts val="0"/>
+              </a:spcAft>
+            </a:pPr>
+            <a:r>
+              <a:rPr sz="700">
+                <a:solidFill>
+                  <a:srgbClr val="606E84"/>
+                </a:solidFill>
+                <a:latin typeface="微软雅黑"/>
+                <a:ea typeface="微软雅黑"/>
+                <a:cs typeface="微软雅黑"/>
+              </a:rPr>
+              <a:t>Campaign / MOR / APR</a:t>
+            </a:r>
+          </a:p>
+          <a:p>
+            <a:pPr algn="ctr">
+              <a:lnSpc>
+                <a:spcPct val="116000"/>
+              </a:lnSpc>
+              <a:spcAft>
+                <a:spcPts val="0"/>
+              </a:spcAft>
+            </a:pPr>
+            <a:r>
+              <a:rPr sz="700">
+                <a:solidFill>
+                  <a:srgbClr val="606E84"/>
+                </a:solidFill>
+                <a:latin typeface="微软雅黑"/>
+                <a:ea typeface="微软雅黑"/>
+                <a:cs typeface="微软雅黑"/>
+              </a:rPr>
+              <a:t>多源数据自动汇编成稿</a:t>
+            </a:r>
+          </a:p>
+        </p:txBody>
+      </p:sp>
+      <p:sp>
+        <p:nvSpPr>
+          <p:cNvPr id="29" name="Rounded Rectangle 28"/>
+          <p:cNvSpPr/>
+          <p:nvPr/>
+        </p:nvSpPr>
+        <p:spPr>
+          <a:xfrm>
+            <a:off x="425196" y="3278124"/>
+            <a:ext cx="1195578" cy="150876"/>
+          </a:xfrm>
+          <a:prstGeom prst="roundRect">
+            <a:avLst>
+              <a:gd name="adj" fmla="val 35000"/>
+            </a:avLst>
+          </a:prstGeom>
+          <a:solidFill>
+            <a:srgbClr val="DBE3EA"/>
+          </a:solidFill>
+          <a:ln>
+            <a:noFill/>
+          </a:ln>
+          <a:effectLst/>
+        </p:spPr>
+        <p:style>
+          <a:lnRef idx="1">
+            <a:schemeClr val="accent1"/>
+          </a:lnRef>
+          <a:fillRef idx="3">
+            <a:schemeClr val="accent1"/>
+          </a:fillRef>
+          <a:effectRef idx="2">
+            <a:schemeClr val="accent1"/>
+          </a:effectRef>
+          <a:fontRef idx="minor">
+            <a:schemeClr val="lt1"/>
+          </a:fontRef>
+        </p:style>
+        <p:txBody>
+          <a:bodyPr rtlCol="0" anchor="ctr"/>
+          <a:lstStyle/>
+          <a:p>
+            <a:pPr algn="ctr"/>
+          </a:p>
+        </p:txBody>
+      </p:sp>
+      <p:sp>
+        <p:nvSpPr>
+          <p:cNvPr id="30" name="TextBox 29"/>
+          <p:cNvSpPr txBox="1"/>
+          <p:nvPr/>
+        </p:nvSpPr>
+        <p:spPr>
+          <a:xfrm>
+            <a:off x="425196" y="3302812"/>
+            <a:ext cx="1195578" cy="128016"/>
+          </a:xfrm>
+          <a:prstGeom prst="rect">
+            <a:avLst/>
+          </a:prstGeom>
+          <a:noFill/>
+        </p:spPr>
+        <p:txBody>
+          <a:bodyPr wrap="square" lIns="0" rIns="0" tIns="0" bIns="0">
+            <a:spAutoFit/>
+          </a:bodyPr>
+          <a:lstStyle/>
+          <a:p>
+            <a:pPr algn="ctr">
+              <a:lnSpc>
+                <a:spcPct val="112000"/>
               </a:lnSpc>
             </a:pPr>
             <a:r>
-              <a:rPr sz="750" b="1">
+              <a:rPr sz="680" b="1">
                 <a:solidFill>
-                  <a:srgbClr val="2E5FA0"/>
+                  <a:srgbClr val="00366A"/>
+                </a:solidFill>
+                <a:latin typeface="微软雅黑"/>
+                <a:ea typeface="微软雅黑"/>
+                <a:cs typeface="微软雅黑"/>
+              </a:rPr>
+              <a:t>工时 -50~70%</a:t>
+            </a:r>
+          </a:p>
+        </p:txBody>
+      </p:sp>
+      <p:sp>
+        <p:nvSpPr>
+          <p:cNvPr id="31" name="Rectangle 30"/>
+          <p:cNvSpPr/>
+          <p:nvPr/>
+        </p:nvSpPr>
+        <p:spPr>
+          <a:xfrm>
+            <a:off x="1767077" y="2267712"/>
+            <a:ext cx="1351025" cy="1188720"/>
+          </a:xfrm>
+          <a:prstGeom prst="rect">
+            <a:avLst/>
+          </a:prstGeom>
+          <a:solidFill>
+            <a:srgbClr val="FFFFFF"/>
+          </a:solidFill>
+          <a:ln w="9525">
+            <a:solidFill>
+              <a:srgbClr val="D8E1EF"/>
+            </a:solidFill>
+          </a:ln>
+          <a:effectLst/>
+        </p:spPr>
+        <p:style>
+          <a:lnRef idx="1">
+            <a:schemeClr val="accent1"/>
+          </a:lnRef>
+          <a:fillRef idx="3">
+            <a:schemeClr val="accent1"/>
+          </a:fillRef>
+          <a:effectRef idx="2">
+            <a:schemeClr val="accent1"/>
+          </a:effectRef>
+          <a:fontRef idx="minor">
+            <a:schemeClr val="lt1"/>
+          </a:fontRef>
+        </p:style>
+        <p:txBody>
+          <a:bodyPr rtlCol="0" anchor="ctr"/>
+          <a:lstStyle/>
+          <a:p>
+            <a:pPr algn="ctr"/>
+          </a:p>
+        </p:txBody>
+      </p:sp>
+      <p:sp>
+        <p:nvSpPr>
+          <p:cNvPr id="32" name="Rectangle 31"/>
+          <p:cNvSpPr/>
+          <p:nvPr/>
+        </p:nvSpPr>
+        <p:spPr>
+          <a:xfrm>
+            <a:off x="1767077" y="2267712"/>
+            <a:ext cx="1351025" cy="41148"/>
+          </a:xfrm>
+          <a:prstGeom prst="rect">
+            <a:avLst/>
+          </a:prstGeom>
+          <a:solidFill>
+            <a:srgbClr val="11507F"/>
+          </a:solidFill>
+          <a:ln>
+            <a:noFill/>
+          </a:ln>
+          <a:effectLst/>
+        </p:spPr>
+        <p:style>
+          <a:lnRef idx="1">
+            <a:schemeClr val="accent1"/>
+          </a:lnRef>
+          <a:fillRef idx="3">
+            <a:schemeClr val="accent1"/>
+          </a:fillRef>
+          <a:effectRef idx="2">
+            <a:schemeClr val="accent1"/>
+          </a:effectRef>
+          <a:fontRef idx="minor">
+            <a:schemeClr val="lt1"/>
+          </a:fontRef>
+        </p:style>
+        <p:txBody>
+          <a:bodyPr rtlCol="0" anchor="ctr"/>
+          <a:lstStyle/>
+          <a:p>
+            <a:pPr algn="ctr"/>
+          </a:p>
+        </p:txBody>
+      </p:sp>
+      <p:sp>
+        <p:nvSpPr>
+          <p:cNvPr id="33" name="Oval 32"/>
+          <p:cNvSpPr/>
+          <p:nvPr/>
+        </p:nvSpPr>
+        <p:spPr>
+          <a:xfrm>
+            <a:off x="2319147" y="2372868"/>
+            <a:ext cx="246888" cy="246888"/>
+          </a:xfrm>
+          <a:prstGeom prst="ellipse">
+            <a:avLst/>
+          </a:prstGeom>
+          <a:solidFill>
+            <a:srgbClr val="11507F"/>
+          </a:solidFill>
+          <a:ln>
+            <a:noFill/>
+          </a:ln>
+          <a:effectLst/>
+        </p:spPr>
+        <p:style>
+          <a:lnRef idx="1">
+            <a:schemeClr val="accent1"/>
+          </a:lnRef>
+          <a:fillRef idx="3">
+            <a:schemeClr val="accent1"/>
+          </a:fillRef>
+          <a:effectRef idx="2">
+            <a:schemeClr val="accent1"/>
+          </a:effectRef>
+          <a:fontRef idx="minor">
+            <a:schemeClr val="lt1"/>
+          </a:fontRef>
+        </p:style>
+        <p:txBody>
+          <a:bodyPr rtlCol="0" anchor="ctr"/>
+          <a:lstStyle/>
+          <a:p>
+            <a:pPr algn="ctr"/>
+          </a:p>
+        </p:txBody>
+      </p:sp>
+      <p:sp>
+        <p:nvSpPr>
+          <p:cNvPr id="34" name="TextBox 33"/>
+          <p:cNvSpPr txBox="1"/>
+          <p:nvPr/>
+        </p:nvSpPr>
+        <p:spPr>
+          <a:xfrm>
+            <a:off x="2319147" y="2416759"/>
+            <a:ext cx="246888" cy="155448"/>
+          </a:xfrm>
+          <a:prstGeom prst="rect">
+            <a:avLst/>
+          </a:prstGeom>
+          <a:noFill/>
+        </p:spPr>
+        <p:txBody>
+          <a:bodyPr wrap="square" lIns="0" rIns="0" tIns="0" bIns="0">
+            <a:spAutoFit/>
+          </a:bodyPr>
+          <a:lstStyle/>
+          <a:p>
+            <a:pPr algn="ctr">
+              <a:lnSpc>
+                <a:spcPct val="112000"/>
+              </a:lnSpc>
+            </a:pPr>
+            <a:r>
+              <a:rPr sz="800" b="1">
+                <a:solidFill>
+                  <a:srgbClr val="FFFFFF"/>
+                </a:solidFill>
+                <a:latin typeface="Arial"/>
+                <a:ea typeface="微软雅黑"/>
+                <a:cs typeface="微软雅黑"/>
+              </a:rPr>
+              <a:t>02</a:t>
+            </a:r>
+          </a:p>
+        </p:txBody>
+      </p:sp>
+      <p:sp>
+        <p:nvSpPr>
+          <p:cNvPr id="35" name="TextBox 34"/>
+          <p:cNvSpPr txBox="1"/>
+          <p:nvPr/>
+        </p:nvSpPr>
+        <p:spPr>
+          <a:xfrm>
+            <a:off x="1812797" y="2656332"/>
+            <a:ext cx="1259585" cy="219456"/>
+          </a:xfrm>
+          <a:prstGeom prst="rect">
+            <a:avLst/>
+          </a:prstGeom>
+          <a:noFill/>
+        </p:spPr>
+        <p:txBody>
+          <a:bodyPr wrap="square" lIns="0" rIns="0" tIns="0" bIns="0">
+            <a:spAutoFit/>
+          </a:bodyPr>
+          <a:lstStyle/>
+          <a:p>
+            <a:pPr algn="ctr">
+              <a:lnSpc>
+                <a:spcPct val="112000"/>
+              </a:lnSpc>
+            </a:pPr>
+            <a:r>
+              <a:rPr sz="1100" b="1">
+                <a:solidFill>
+                  <a:srgbClr val="11507F"/>
                 </a:solidFill>
                 <a:latin typeface="微软雅黑"/>
                 <a:ea typeface="微软雅黑"/>
@@ -4024,22 +4569,20 @@
       </p:sp>
       <p:sp>
         <p:nvSpPr>
-          <p:cNvPr id="24" name="Rounded Rectangle 23"/>
+          <p:cNvPr id="36" name="Rectangle 35"/>
           <p:cNvSpPr/>
           <p:nvPr/>
         </p:nvSpPr>
         <p:spPr>
           <a:xfrm>
-            <a:off x="2532888" y="2468879"/>
-            <a:ext cx="694944" cy="192024"/>
-          </a:xfrm>
-          <a:prstGeom prst="roundRect">
-            <a:avLst>
-              <a:gd name="adj" fmla="val 28000"/>
-            </a:avLst>
+            <a:off x="2287143" y="2894076"/>
+            <a:ext cx="310896" cy="18288"/>
+          </a:xfrm>
+          <a:prstGeom prst="rect">
+            <a:avLst/>
           </a:prstGeom>
           <a:solidFill>
-            <a:srgbClr val="FFFFFF"/>
+            <a:srgbClr val="D8E1EF"/>
           </a:solidFill>
           <a:ln>
             <a:noFill/>
@@ -4070,14 +4613,14 @@
       </p:sp>
       <p:sp>
         <p:nvSpPr>
-          <p:cNvPr id="25" name="TextBox 24"/>
+          <p:cNvPr id="37" name="TextBox 36"/>
           <p:cNvSpPr txBox="1"/>
           <p:nvPr/>
         </p:nvSpPr>
         <p:spPr>
           <a:xfrm>
-            <a:off x="2532888" y="2494483"/>
-            <a:ext cx="694944" cy="155448"/>
+            <a:off x="1831085" y="2958084"/>
+            <a:ext cx="1223010" cy="310896"/>
           </a:xfrm>
           <a:prstGeom prst="rect">
             <a:avLst/>
@@ -4092,11 +4635,338 @@
           <a:p>
             <a:pPr algn="ctr">
               <a:lnSpc>
-                <a:spcPct val="115000"/>
+                <a:spcPct val="116000"/>
+              </a:lnSpc>
+              <a:spcAft>
+                <a:spcPts val="0"/>
+              </a:spcAft>
+            </a:pPr>
+            <a:r>
+              <a:rPr sz="700">
+                <a:solidFill>
+                  <a:srgbClr val="606E84"/>
+                </a:solidFill>
+                <a:latin typeface="微软雅黑"/>
+                <a:ea typeface="微软雅黑"/>
+                <a:cs typeface="微软雅黑"/>
+              </a:rPr>
+              <a:t>工艺包审查 + 放大风险</a:t>
+            </a:r>
+          </a:p>
+          <a:p>
+            <a:pPr algn="ctr">
+              <a:lnSpc>
+                <a:spcPct val="116000"/>
+              </a:lnSpc>
+              <a:spcAft>
+                <a:spcPts val="0"/>
+              </a:spcAft>
+            </a:pPr>
+            <a:r>
+              <a:rPr sz="700">
+                <a:solidFill>
+                  <a:srgbClr val="606E84"/>
+                </a:solidFill>
+                <a:latin typeface="微软雅黑"/>
+                <a:ea typeface="微软雅黑"/>
+                <a:cs typeface="微软雅黑"/>
+              </a:rPr>
+              <a:t>识别，历史经验结构化</a:t>
+            </a:r>
+          </a:p>
+        </p:txBody>
+      </p:sp>
+      <p:sp>
+        <p:nvSpPr>
+          <p:cNvPr id="38" name="Rounded Rectangle 37"/>
+          <p:cNvSpPr/>
+          <p:nvPr/>
+        </p:nvSpPr>
+        <p:spPr>
+          <a:xfrm>
+            <a:off x="1844801" y="3278124"/>
+            <a:ext cx="1195578" cy="150876"/>
+          </a:xfrm>
+          <a:prstGeom prst="roundRect">
+            <a:avLst>
+              <a:gd name="adj" fmla="val 35000"/>
+            </a:avLst>
+          </a:prstGeom>
+          <a:solidFill>
+            <a:srgbClr val="DEE6ED"/>
+          </a:solidFill>
+          <a:ln>
+            <a:noFill/>
+          </a:ln>
+          <a:effectLst/>
+        </p:spPr>
+        <p:style>
+          <a:lnRef idx="1">
+            <a:schemeClr val="accent1"/>
+          </a:lnRef>
+          <a:fillRef idx="3">
+            <a:schemeClr val="accent1"/>
+          </a:fillRef>
+          <a:effectRef idx="2">
+            <a:schemeClr val="accent1"/>
+          </a:effectRef>
+          <a:fontRef idx="minor">
+            <a:schemeClr val="lt1"/>
+          </a:fontRef>
+        </p:style>
+        <p:txBody>
+          <a:bodyPr rtlCol="0" anchor="ctr"/>
+          <a:lstStyle/>
+          <a:p>
+            <a:pPr algn="ctr"/>
+          </a:p>
+        </p:txBody>
+      </p:sp>
+      <p:sp>
+        <p:nvSpPr>
+          <p:cNvPr id="39" name="TextBox 38"/>
+          <p:cNvSpPr txBox="1"/>
+          <p:nvPr/>
+        </p:nvSpPr>
+        <p:spPr>
+          <a:xfrm>
+            <a:off x="1844801" y="3302812"/>
+            <a:ext cx="1195578" cy="128016"/>
+          </a:xfrm>
+          <a:prstGeom prst="rect">
+            <a:avLst/>
+          </a:prstGeom>
+          <a:noFill/>
+        </p:spPr>
+        <p:txBody>
+          <a:bodyPr wrap="square" lIns="0" rIns="0" tIns="0" bIns="0">
+            <a:spAutoFit/>
+          </a:bodyPr>
+          <a:lstStyle/>
+          <a:p>
+            <a:pPr algn="ctr">
+              <a:lnSpc>
+                <a:spcPct val="112000"/>
               </a:lnSpc>
             </a:pPr>
             <a:r>
-              <a:rPr sz="750" b="1">
+              <a:rPr sz="680" b="1">
+                <a:solidFill>
+                  <a:srgbClr val="11507F"/>
+                </a:solidFill>
+                <a:latin typeface="微软雅黑"/>
+                <a:ea typeface="微软雅黑"/>
+                <a:cs typeface="微软雅黑"/>
+              </a:rPr>
+              <a:t>NPI 周期 -30%</a:t>
+            </a:r>
+          </a:p>
+        </p:txBody>
+      </p:sp>
+      <p:sp>
+        <p:nvSpPr>
+          <p:cNvPr id="40" name="Rectangle 39"/>
+          <p:cNvSpPr/>
+          <p:nvPr/>
+        </p:nvSpPr>
+        <p:spPr>
+          <a:xfrm>
+            <a:off x="3186683" y="2267712"/>
+            <a:ext cx="1351025" cy="1188720"/>
+          </a:xfrm>
+          <a:prstGeom prst="rect">
+            <a:avLst/>
+          </a:prstGeom>
+          <a:solidFill>
+            <a:srgbClr val="FFFFFF"/>
+          </a:solidFill>
+          <a:ln w="9525">
+            <a:solidFill>
+              <a:srgbClr val="D8E1EF"/>
+            </a:solidFill>
+          </a:ln>
+          <a:effectLst/>
+        </p:spPr>
+        <p:style>
+          <a:lnRef idx="1">
+            <a:schemeClr val="accent1"/>
+          </a:lnRef>
+          <a:fillRef idx="3">
+            <a:schemeClr val="accent1"/>
+          </a:fillRef>
+          <a:effectRef idx="2">
+            <a:schemeClr val="accent1"/>
+          </a:effectRef>
+          <a:fontRef idx="minor">
+            <a:schemeClr val="lt1"/>
+          </a:fontRef>
+        </p:style>
+        <p:txBody>
+          <a:bodyPr rtlCol="0" anchor="ctr"/>
+          <a:lstStyle/>
+          <a:p>
+            <a:pPr algn="ctr"/>
+          </a:p>
+        </p:txBody>
+      </p:sp>
+      <p:sp>
+        <p:nvSpPr>
+          <p:cNvPr id="41" name="Rectangle 40"/>
+          <p:cNvSpPr/>
+          <p:nvPr/>
+        </p:nvSpPr>
+        <p:spPr>
+          <a:xfrm>
+            <a:off x="3186683" y="2267712"/>
+            <a:ext cx="1351025" cy="41148"/>
+          </a:xfrm>
+          <a:prstGeom prst="rect">
+            <a:avLst/>
+          </a:prstGeom>
+          <a:solidFill>
+            <a:srgbClr val="2E5FA0"/>
+          </a:solidFill>
+          <a:ln>
+            <a:noFill/>
+          </a:ln>
+          <a:effectLst/>
+        </p:spPr>
+        <p:style>
+          <a:lnRef idx="1">
+            <a:schemeClr val="accent1"/>
+          </a:lnRef>
+          <a:fillRef idx="3">
+            <a:schemeClr val="accent1"/>
+          </a:fillRef>
+          <a:effectRef idx="2">
+            <a:schemeClr val="accent1"/>
+          </a:effectRef>
+          <a:fontRef idx="minor">
+            <a:schemeClr val="lt1"/>
+          </a:fontRef>
+        </p:style>
+        <p:txBody>
+          <a:bodyPr rtlCol="0" anchor="ctr"/>
+          <a:lstStyle/>
+          <a:p>
+            <a:pPr algn="ctr"/>
+          </a:p>
+        </p:txBody>
+      </p:sp>
+      <p:sp>
+        <p:nvSpPr>
+          <p:cNvPr id="42" name="Oval 41"/>
+          <p:cNvSpPr/>
+          <p:nvPr/>
+        </p:nvSpPr>
+        <p:spPr>
+          <a:xfrm>
+            <a:off x="3738752" y="2372868"/>
+            <a:ext cx="246888" cy="246888"/>
+          </a:xfrm>
+          <a:prstGeom prst="ellipse">
+            <a:avLst/>
+          </a:prstGeom>
+          <a:solidFill>
+            <a:srgbClr val="2E5FA0"/>
+          </a:solidFill>
+          <a:ln>
+            <a:noFill/>
+          </a:ln>
+          <a:effectLst/>
+        </p:spPr>
+        <p:style>
+          <a:lnRef idx="1">
+            <a:schemeClr val="accent1"/>
+          </a:lnRef>
+          <a:fillRef idx="3">
+            <a:schemeClr val="accent1"/>
+          </a:fillRef>
+          <a:effectRef idx="2">
+            <a:schemeClr val="accent1"/>
+          </a:effectRef>
+          <a:fontRef idx="minor">
+            <a:schemeClr val="lt1"/>
+          </a:fontRef>
+        </p:style>
+        <p:txBody>
+          <a:bodyPr rtlCol="0" anchor="ctr"/>
+          <a:lstStyle/>
+          <a:p>
+            <a:pPr algn="ctr"/>
+          </a:p>
+        </p:txBody>
+      </p:sp>
+      <p:sp>
+        <p:nvSpPr>
+          <p:cNvPr id="43" name="TextBox 42"/>
+          <p:cNvSpPr txBox="1"/>
+          <p:nvPr/>
+        </p:nvSpPr>
+        <p:spPr>
+          <a:xfrm>
+            <a:off x="3738752" y="2416759"/>
+            <a:ext cx="246888" cy="155448"/>
+          </a:xfrm>
+          <a:prstGeom prst="rect">
+            <a:avLst/>
+          </a:prstGeom>
+          <a:noFill/>
+        </p:spPr>
+        <p:txBody>
+          <a:bodyPr wrap="square" lIns="0" rIns="0" tIns="0" bIns="0">
+            <a:spAutoFit/>
+          </a:bodyPr>
+          <a:lstStyle/>
+          <a:p>
+            <a:pPr algn="ctr">
+              <a:lnSpc>
+                <a:spcPct val="112000"/>
+              </a:lnSpc>
+            </a:pPr>
+            <a:r>
+              <a:rPr sz="800" b="1">
+                <a:solidFill>
+                  <a:srgbClr val="FFFFFF"/>
+                </a:solidFill>
+                <a:latin typeface="Arial"/>
+                <a:ea typeface="微软雅黑"/>
+                <a:cs typeface="微软雅黑"/>
+              </a:rPr>
+              <a:t>03</a:t>
+            </a:r>
+          </a:p>
+        </p:txBody>
+      </p:sp>
+      <p:sp>
+        <p:nvSpPr>
+          <p:cNvPr id="44" name="TextBox 43"/>
+          <p:cNvSpPr txBox="1"/>
+          <p:nvPr/>
+        </p:nvSpPr>
+        <p:spPr>
+          <a:xfrm>
+            <a:off x="3232403" y="2656332"/>
+            <a:ext cx="1259585" cy="219456"/>
+          </a:xfrm>
+          <a:prstGeom prst="rect">
+            <a:avLst/>
+          </a:prstGeom>
+          <a:noFill/>
+        </p:spPr>
+        <p:txBody>
+          <a:bodyPr wrap="square" lIns="0" rIns="0" tIns="0" bIns="0">
+            <a:spAutoFit/>
+          </a:bodyPr>
+          <a:lstStyle/>
+          <a:p>
+            <a:pPr algn="ctr">
+              <a:lnSpc>
+                <a:spcPct val="112000"/>
+              </a:lnSpc>
+            </a:pPr>
+            <a:r>
+              <a:rPr sz="1100" b="1">
                 <a:solidFill>
                   <a:srgbClr val="2E5FA0"/>
                 </a:solidFill>
@@ -4111,22 +4981,20 @@
       </p:sp>
       <p:sp>
         <p:nvSpPr>
-          <p:cNvPr id="26" name="Rounded Rectangle 25"/>
+          <p:cNvPr id="45" name="Rectangle 44"/>
           <p:cNvSpPr/>
           <p:nvPr/>
         </p:nvSpPr>
         <p:spPr>
           <a:xfrm>
-            <a:off x="1042416" y="2702051"/>
-            <a:ext cx="694944" cy="192024"/>
-          </a:xfrm>
-          <a:prstGeom prst="roundRect">
-            <a:avLst>
-              <a:gd name="adj" fmla="val 28000"/>
-            </a:avLst>
+            <a:off x="3706748" y="2894076"/>
+            <a:ext cx="310896" cy="18288"/>
+          </a:xfrm>
+          <a:prstGeom prst="rect">
+            <a:avLst/>
           </a:prstGeom>
           <a:solidFill>
-            <a:srgbClr val="FFFFFF"/>
+            <a:srgbClr val="D8E1EF"/>
           </a:solidFill>
           <a:ln>
             <a:noFill/>
@@ -4157,14 +5025,14 @@
       </p:sp>
       <p:sp>
         <p:nvSpPr>
-          <p:cNvPr id="27" name="TextBox 26"/>
+          <p:cNvPr id="46" name="TextBox 45"/>
           <p:cNvSpPr txBox="1"/>
           <p:nvPr/>
         </p:nvSpPr>
         <p:spPr>
           <a:xfrm>
-            <a:off x="1042416" y="2727655"/>
-            <a:ext cx="694944" cy="155448"/>
+            <a:off x="3250691" y="2958084"/>
+            <a:ext cx="1223010" cy="310896"/>
           </a:xfrm>
           <a:prstGeom prst="rect">
             <a:avLst/>
@@ -4179,11 +5047,122 @@
           <a:p>
             <a:pPr algn="ctr">
               <a:lnSpc>
-                <a:spcPct val="115000"/>
+                <a:spcPct val="116000"/>
+              </a:lnSpc>
+              <a:spcAft>
+                <a:spcPts val="0"/>
+              </a:spcAft>
+            </a:pPr>
+            <a:r>
+              <a:rPr sz="700">
+                <a:solidFill>
+                  <a:srgbClr val="606E84"/>
+                </a:solidFill>
+                <a:latin typeface="微软雅黑"/>
+                <a:ea typeface="微软雅黑"/>
+                <a:cs typeface="微软雅黑"/>
+              </a:rPr>
+              <a:t>点检 / 备件 / 预测维护 /</a:t>
+            </a:r>
+          </a:p>
+          <a:p>
+            <a:pPr algn="ctr">
+              <a:lnSpc>
+                <a:spcPct val="116000"/>
+              </a:lnSpc>
+              <a:spcAft>
+                <a:spcPts val="0"/>
+              </a:spcAft>
+            </a:pPr>
+            <a:r>
+              <a:rPr sz="700">
+                <a:solidFill>
+                  <a:srgbClr val="606E84"/>
+                </a:solidFill>
+                <a:latin typeface="微软雅黑"/>
+                <a:ea typeface="微软雅黑"/>
+                <a:cs typeface="微软雅黑"/>
+              </a:rPr>
+              <a:t>验证 / 故障调查 五合一</a:t>
+            </a:r>
+          </a:p>
+        </p:txBody>
+      </p:sp>
+      <p:sp>
+        <p:nvSpPr>
+          <p:cNvPr id="47" name="Rounded Rectangle 46"/>
+          <p:cNvSpPr/>
+          <p:nvPr/>
+        </p:nvSpPr>
+        <p:spPr>
+          <a:xfrm>
+            <a:off x="3264407" y="3278124"/>
+            <a:ext cx="1195578" cy="150876"/>
+          </a:xfrm>
+          <a:prstGeom prst="roundRect">
+            <a:avLst>
+              <a:gd name="adj" fmla="val 35000"/>
+            </a:avLst>
+          </a:prstGeom>
+          <a:solidFill>
+            <a:srgbClr val="E2E9F2"/>
+          </a:solidFill>
+          <a:ln>
+            <a:noFill/>
+          </a:ln>
+          <a:effectLst/>
+        </p:spPr>
+        <p:style>
+          <a:lnRef idx="1">
+            <a:schemeClr val="accent1"/>
+          </a:lnRef>
+          <a:fillRef idx="3">
+            <a:schemeClr val="accent1"/>
+          </a:fillRef>
+          <a:effectRef idx="2">
+            <a:schemeClr val="accent1"/>
+          </a:effectRef>
+          <a:fontRef idx="minor">
+            <a:schemeClr val="lt1"/>
+          </a:fontRef>
+        </p:style>
+        <p:txBody>
+          <a:bodyPr rtlCol="0" anchor="ctr"/>
+          <a:lstStyle/>
+          <a:p>
+            <a:pPr algn="ctr"/>
+          </a:p>
+        </p:txBody>
+      </p:sp>
+      <p:sp>
+        <p:nvSpPr>
+          <p:cNvPr id="48" name="TextBox 47"/>
+          <p:cNvSpPr txBox="1"/>
+          <p:nvPr/>
+        </p:nvSpPr>
+        <p:spPr>
+          <a:xfrm>
+            <a:off x="3264407" y="3302812"/>
+            <a:ext cx="1195578" cy="128016"/>
+          </a:xfrm>
+          <a:prstGeom prst="rect">
+            <a:avLst/>
+          </a:prstGeom>
+          <a:noFill/>
+        </p:spPr>
+        <p:txBody>
+          <a:bodyPr wrap="square" lIns="0" rIns="0" tIns="0" bIns="0">
+            <a:spAutoFit/>
+          </a:bodyPr>
+          <a:lstStyle/>
+          <a:p>
+            <a:pPr algn="ctr">
+              <a:lnSpc>
+                <a:spcPct val="112000"/>
               </a:lnSpc>
             </a:pPr>
             <a:r>
-              <a:rPr sz="750" b="1">
+              <a:rPr sz="680" b="1">
                 <a:solidFill>
                   <a:srgbClr val="2E5FA0"/>
                 </a:solidFill>
@@ -4191,29 +5170,73 @@
                 <a:ea typeface="微软雅黑"/>
                 <a:cs typeface="微软雅黑"/>
               </a:rPr>
-              <a:t>视觉合规</a:t>
-            </a:r>
-          </a:p>
-        </p:txBody>
-      </p:sp>
-      <p:sp>
-        <p:nvSpPr>
-          <p:cNvPr id="28" name="Rounded Rectangle 27"/>
+              <a:t>非计划停机 -40%</a:t>
+            </a:r>
+          </a:p>
+        </p:txBody>
+      </p:sp>
+      <p:sp>
+        <p:nvSpPr>
+          <p:cNvPr id="49" name="Rectangle 48"/>
           <p:cNvSpPr/>
           <p:nvPr/>
         </p:nvSpPr>
         <p:spPr>
           <a:xfrm>
-            <a:off x="1787652" y="2702051"/>
-            <a:ext cx="694944" cy="192024"/>
-          </a:xfrm>
-          <a:prstGeom prst="roundRect">
-            <a:avLst>
-              <a:gd name="adj" fmla="val 28000"/>
-            </a:avLst>
+            <a:off x="4606289" y="2267712"/>
+            <a:ext cx="1351025" cy="1188720"/>
+          </a:xfrm>
+          <a:prstGeom prst="rect">
+            <a:avLst/>
           </a:prstGeom>
           <a:solidFill>
             <a:srgbClr val="FFFFFF"/>
+          </a:solidFill>
+          <a:ln w="9525">
+            <a:solidFill>
+              <a:srgbClr val="D8E1EF"/>
+            </a:solidFill>
+          </a:ln>
+          <a:effectLst/>
+        </p:spPr>
+        <p:style>
+          <a:lnRef idx="1">
+            <a:schemeClr val="accent1"/>
+          </a:lnRef>
+          <a:fillRef idx="3">
+            <a:schemeClr val="accent1"/>
+          </a:fillRef>
+          <a:effectRef idx="2">
+            <a:schemeClr val="accent1"/>
+          </a:effectRef>
+          <a:fontRef idx="minor">
+            <a:schemeClr val="lt1"/>
+          </a:fontRef>
+        </p:style>
+        <p:txBody>
+          <a:bodyPr rtlCol="0" anchor="ctr"/>
+          <a:lstStyle/>
+          <a:p>
+            <a:pPr algn="ctr"/>
+          </a:p>
+        </p:txBody>
+      </p:sp>
+      <p:sp>
+        <p:nvSpPr>
+          <p:cNvPr id="50" name="Rectangle 49"/>
+          <p:cNvSpPr/>
+          <p:nvPr/>
+        </p:nvSpPr>
+        <p:spPr>
+          <a:xfrm>
+            <a:off x="4606289" y="2267712"/>
+            <a:ext cx="1351025" cy="41148"/>
+          </a:xfrm>
+          <a:prstGeom prst="rect">
+            <a:avLst/>
+          </a:prstGeom>
+          <a:solidFill>
+            <a:srgbClr val="1187A8"/>
           </a:solidFill>
           <a:ln>
             <a:noFill/>
@@ -4244,14 +5267,58 @@
       </p:sp>
       <p:sp>
         <p:nvSpPr>
-          <p:cNvPr id="29" name="TextBox 28"/>
+          <p:cNvPr id="51" name="Oval 50"/>
+          <p:cNvSpPr/>
+          <p:nvPr/>
+        </p:nvSpPr>
+        <p:spPr>
+          <a:xfrm>
+            <a:off x="5158358" y="2372868"/>
+            <a:ext cx="246888" cy="246888"/>
+          </a:xfrm>
+          <a:prstGeom prst="ellipse">
+            <a:avLst/>
+          </a:prstGeom>
+          <a:solidFill>
+            <a:srgbClr val="1187A8"/>
+          </a:solidFill>
+          <a:ln>
+            <a:noFill/>
+          </a:ln>
+          <a:effectLst/>
+        </p:spPr>
+        <p:style>
+          <a:lnRef idx="1">
+            <a:schemeClr val="accent1"/>
+          </a:lnRef>
+          <a:fillRef idx="3">
+            <a:schemeClr val="accent1"/>
+          </a:fillRef>
+          <a:effectRef idx="2">
+            <a:schemeClr val="accent1"/>
+          </a:effectRef>
+          <a:fontRef idx="minor">
+            <a:schemeClr val="lt1"/>
+          </a:fontRef>
+        </p:style>
+        <p:txBody>
+          <a:bodyPr rtlCol="0" anchor="ctr"/>
+          <a:lstStyle/>
+          <a:p>
+            <a:pPr algn="ctr"/>
+          </a:p>
+        </p:txBody>
+      </p:sp>
+      <p:sp>
+        <p:nvSpPr>
+          <p:cNvPr id="52" name="TextBox 51"/>
           <p:cNvSpPr txBox="1"/>
           <p:nvPr/>
         </p:nvSpPr>
         <p:spPr>
           <a:xfrm>
-            <a:off x="1787652" y="2727655"/>
-            <a:ext cx="694944" cy="155448"/>
+            <a:off x="5158358" y="2416759"/>
+            <a:ext cx="246888" cy="155448"/>
           </a:xfrm>
           <a:prstGeom prst="rect">
             <a:avLst/>
@@ -4266,13 +5333,466 @@
           <a:p>
             <a:pPr algn="ctr">
               <a:lnSpc>
-                <a:spcPct val="115000"/>
+                <a:spcPct val="112000"/>
               </a:lnSpc>
             </a:pPr>
             <a:r>
-              <a:rPr sz="750" b="1">
+              <a:rPr sz="800" b="1">
                 <a:solidFill>
-                  <a:srgbClr val="2E5FA0"/>
+                  <a:srgbClr val="FFFFFF"/>
+                </a:solidFill>
+                <a:latin typeface="Arial"/>
+                <a:ea typeface="微软雅黑"/>
+                <a:cs typeface="微软雅黑"/>
+              </a:rPr>
+              <a:t>04</a:t>
+            </a:r>
+          </a:p>
+        </p:txBody>
+      </p:sp>
+      <p:sp>
+        <p:nvSpPr>
+          <p:cNvPr id="53" name="TextBox 52"/>
+          <p:cNvSpPr txBox="1"/>
+          <p:nvPr/>
+        </p:nvSpPr>
+        <p:spPr>
+          <a:xfrm>
+            <a:off x="4652009" y="2656332"/>
+            <a:ext cx="1259585" cy="219456"/>
+          </a:xfrm>
+          <a:prstGeom prst="rect">
+            <a:avLst/>
+          </a:prstGeom>
+          <a:noFill/>
+        </p:spPr>
+        <p:txBody>
+          <a:bodyPr wrap="square" lIns="0" rIns="0" tIns="0" bIns="0">
+            <a:spAutoFit/>
+          </a:bodyPr>
+          <a:lstStyle/>
+          <a:p>
+            <a:pPr algn="ctr">
+              <a:lnSpc>
+                <a:spcPct val="112000"/>
+              </a:lnSpc>
+            </a:pPr>
+            <a:r>
+              <a:rPr sz="1100" b="1">
+                <a:solidFill>
+                  <a:srgbClr val="1187A8"/>
+                </a:solidFill>
+                <a:latin typeface="微软雅黑"/>
+                <a:ea typeface="微软雅黑"/>
+                <a:cs typeface="微软雅黑"/>
+              </a:rPr>
+              <a:t>视觉合规</a:t>
+            </a:r>
+          </a:p>
+        </p:txBody>
+      </p:sp>
+      <p:sp>
+        <p:nvSpPr>
+          <p:cNvPr id="54" name="Rectangle 53"/>
+          <p:cNvSpPr/>
+          <p:nvPr/>
+        </p:nvSpPr>
+        <p:spPr>
+          <a:xfrm>
+            <a:off x="5126354" y="2894076"/>
+            <a:ext cx="310896" cy="18288"/>
+          </a:xfrm>
+          <a:prstGeom prst="rect">
+            <a:avLst/>
+          </a:prstGeom>
+          <a:solidFill>
+            <a:srgbClr val="D8E1EF"/>
+          </a:solidFill>
+          <a:ln>
+            <a:noFill/>
+          </a:ln>
+          <a:effectLst/>
+        </p:spPr>
+        <p:style>
+          <a:lnRef idx="1">
+            <a:schemeClr val="accent1"/>
+          </a:lnRef>
+          <a:fillRef idx="3">
+            <a:schemeClr val="accent1"/>
+          </a:fillRef>
+          <a:effectRef idx="2">
+            <a:schemeClr val="accent1"/>
+          </a:effectRef>
+          <a:fontRef idx="minor">
+            <a:schemeClr val="lt1"/>
+          </a:fontRef>
+        </p:style>
+        <p:txBody>
+          <a:bodyPr rtlCol="0" anchor="ctr"/>
+          <a:lstStyle/>
+          <a:p>
+            <a:pPr algn="ctr"/>
+          </a:p>
+        </p:txBody>
+      </p:sp>
+      <p:sp>
+        <p:nvSpPr>
+          <p:cNvPr id="55" name="TextBox 54"/>
+          <p:cNvSpPr txBox="1"/>
+          <p:nvPr/>
+        </p:nvSpPr>
+        <p:spPr>
+          <a:xfrm>
+            <a:off x="4670297" y="2958084"/>
+            <a:ext cx="1223010" cy="310896"/>
+          </a:xfrm>
+          <a:prstGeom prst="rect">
+            <a:avLst/>
+          </a:prstGeom>
+          <a:noFill/>
+        </p:spPr>
+        <p:txBody>
+          <a:bodyPr wrap="square" lIns="0" rIns="0" tIns="0" bIns="0">
+            <a:spAutoFit/>
+          </a:bodyPr>
+          <a:lstStyle/>
+          <a:p>
+            <a:pPr algn="ctr">
+              <a:lnSpc>
+                <a:spcPct val="116000"/>
+              </a:lnSpc>
+              <a:spcAft>
+                <a:spcPts val="0"/>
+              </a:spcAft>
+            </a:pPr>
+            <a:r>
+              <a:rPr sz="700">
+                <a:solidFill>
+                  <a:srgbClr val="606E84"/>
+                </a:solidFill>
+                <a:latin typeface="微软雅黑"/>
+                <a:ea typeface="微软雅黑"/>
+                <a:cs typeface="微软雅黑"/>
+              </a:rPr>
+              <a:t>车间视频流实时识别</a:t>
+            </a:r>
+          </a:p>
+          <a:p>
+            <a:pPr algn="ctr">
+              <a:lnSpc>
+                <a:spcPct val="116000"/>
+              </a:lnSpc>
+              <a:spcAft>
+                <a:spcPts val="0"/>
+              </a:spcAft>
+            </a:pPr>
+            <a:r>
+              <a:rPr sz="700">
+                <a:solidFill>
+                  <a:srgbClr val="606E84"/>
+                </a:solidFill>
+                <a:latin typeface="微软雅黑"/>
+                <a:ea typeface="微软雅黑"/>
+                <a:cs typeface="微软雅黑"/>
+              </a:rPr>
+              <a:t>SOP 关键动作执行偏差</a:t>
+            </a:r>
+          </a:p>
+        </p:txBody>
+      </p:sp>
+      <p:sp>
+        <p:nvSpPr>
+          <p:cNvPr id="56" name="Rounded Rectangle 55"/>
+          <p:cNvSpPr/>
+          <p:nvPr/>
+        </p:nvSpPr>
+        <p:spPr>
+          <a:xfrm>
+            <a:off x="4684013" y="3278124"/>
+            <a:ext cx="1195578" cy="150876"/>
+          </a:xfrm>
+          <a:prstGeom prst="roundRect">
+            <a:avLst>
+              <a:gd name="adj" fmla="val 35000"/>
+            </a:avLst>
+          </a:prstGeom>
+          <a:solidFill>
+            <a:srgbClr val="DEEEF3"/>
+          </a:solidFill>
+          <a:ln>
+            <a:noFill/>
+          </a:ln>
+          <a:effectLst/>
+        </p:spPr>
+        <p:style>
+          <a:lnRef idx="1">
+            <a:schemeClr val="accent1"/>
+          </a:lnRef>
+          <a:fillRef idx="3">
+            <a:schemeClr val="accent1"/>
+          </a:fillRef>
+          <a:effectRef idx="2">
+            <a:schemeClr val="accent1"/>
+          </a:effectRef>
+          <a:fontRef idx="minor">
+            <a:schemeClr val="lt1"/>
+          </a:fontRef>
+        </p:style>
+        <p:txBody>
+          <a:bodyPr rtlCol="0" anchor="ctr"/>
+          <a:lstStyle/>
+          <a:p>
+            <a:pPr algn="ctr"/>
+          </a:p>
+        </p:txBody>
+      </p:sp>
+      <p:sp>
+        <p:nvSpPr>
+          <p:cNvPr id="57" name="TextBox 56"/>
+          <p:cNvSpPr txBox="1"/>
+          <p:nvPr/>
+        </p:nvSpPr>
+        <p:spPr>
+          <a:xfrm>
+            <a:off x="4684013" y="3302812"/>
+            <a:ext cx="1195578" cy="128016"/>
+          </a:xfrm>
+          <a:prstGeom prst="rect">
+            <a:avLst/>
+          </a:prstGeom>
+          <a:noFill/>
+        </p:spPr>
+        <p:txBody>
+          <a:bodyPr wrap="square" lIns="0" rIns="0" tIns="0" bIns="0">
+            <a:spAutoFit/>
+          </a:bodyPr>
+          <a:lstStyle/>
+          <a:p>
+            <a:pPr algn="ctr">
+              <a:lnSpc>
+                <a:spcPct val="112000"/>
+              </a:lnSpc>
+            </a:pPr>
+            <a:r>
+              <a:rPr sz="680" b="1">
+                <a:solidFill>
+                  <a:srgbClr val="1187A8"/>
+                </a:solidFill>
+                <a:latin typeface="微软雅黑"/>
+                <a:ea typeface="微软雅黑"/>
+                <a:cs typeface="微软雅黑"/>
+              </a:rPr>
+              <a:t>巡检替代 30~50%</a:t>
+            </a:r>
+          </a:p>
+        </p:txBody>
+      </p:sp>
+      <p:sp>
+        <p:nvSpPr>
+          <p:cNvPr id="58" name="Rectangle 57"/>
+          <p:cNvSpPr/>
+          <p:nvPr/>
+        </p:nvSpPr>
+        <p:spPr>
+          <a:xfrm>
+            <a:off x="6025895" y="2267712"/>
+            <a:ext cx="1351025" cy="1188720"/>
+          </a:xfrm>
+          <a:prstGeom prst="rect">
+            <a:avLst/>
+          </a:prstGeom>
+          <a:solidFill>
+            <a:srgbClr val="FFFFFF"/>
+          </a:solidFill>
+          <a:ln w="9525">
+            <a:solidFill>
+              <a:srgbClr val="D8E1EF"/>
+            </a:solidFill>
+          </a:ln>
+          <a:effectLst/>
+        </p:spPr>
+        <p:style>
+          <a:lnRef idx="1">
+            <a:schemeClr val="accent1"/>
+          </a:lnRef>
+          <a:fillRef idx="3">
+            <a:schemeClr val="accent1"/>
+          </a:fillRef>
+          <a:effectRef idx="2">
+            <a:schemeClr val="accent1"/>
+          </a:effectRef>
+          <a:fontRef idx="minor">
+            <a:schemeClr val="lt1"/>
+          </a:fontRef>
+        </p:style>
+        <p:txBody>
+          <a:bodyPr rtlCol="0" anchor="ctr"/>
+          <a:lstStyle/>
+          <a:p>
+            <a:pPr algn="ctr"/>
+          </a:p>
+        </p:txBody>
+      </p:sp>
+      <p:sp>
+        <p:nvSpPr>
+          <p:cNvPr id="59" name="Rectangle 58"/>
+          <p:cNvSpPr/>
+          <p:nvPr/>
+        </p:nvSpPr>
+        <p:spPr>
+          <a:xfrm>
+            <a:off x="6025895" y="2267712"/>
+            <a:ext cx="1351025" cy="41148"/>
+          </a:xfrm>
+          <a:prstGeom prst="rect">
+            <a:avLst/>
+          </a:prstGeom>
+          <a:solidFill>
+            <a:srgbClr val="C86A2E"/>
+          </a:solidFill>
+          <a:ln>
+            <a:noFill/>
+          </a:ln>
+          <a:effectLst/>
+        </p:spPr>
+        <p:style>
+          <a:lnRef idx="1">
+            <a:schemeClr val="accent1"/>
+          </a:lnRef>
+          <a:fillRef idx="3">
+            <a:schemeClr val="accent1"/>
+          </a:fillRef>
+          <a:effectRef idx="2">
+            <a:schemeClr val="accent1"/>
+          </a:effectRef>
+          <a:fontRef idx="minor">
+            <a:schemeClr val="lt1"/>
+          </a:fontRef>
+        </p:style>
+        <p:txBody>
+          <a:bodyPr rtlCol="0" anchor="ctr"/>
+          <a:lstStyle/>
+          <a:p>
+            <a:pPr algn="ctr"/>
+          </a:p>
+        </p:txBody>
+      </p:sp>
+      <p:sp>
+        <p:nvSpPr>
+          <p:cNvPr id="60" name="Oval 59"/>
+          <p:cNvSpPr/>
+          <p:nvPr/>
+        </p:nvSpPr>
+        <p:spPr>
+          <a:xfrm>
+            <a:off x="6577964" y="2372868"/>
+            <a:ext cx="246888" cy="246888"/>
+          </a:xfrm>
+          <a:prstGeom prst="ellipse">
+            <a:avLst/>
+          </a:prstGeom>
+          <a:solidFill>
+            <a:srgbClr val="C86A2E"/>
+          </a:solidFill>
+          <a:ln>
+            <a:noFill/>
+          </a:ln>
+          <a:effectLst/>
+        </p:spPr>
+        <p:style>
+          <a:lnRef idx="1">
+            <a:schemeClr val="accent1"/>
+          </a:lnRef>
+          <a:fillRef idx="3">
+            <a:schemeClr val="accent1"/>
+          </a:fillRef>
+          <a:effectRef idx="2">
+            <a:schemeClr val="accent1"/>
+          </a:effectRef>
+          <a:fontRef idx="minor">
+            <a:schemeClr val="lt1"/>
+          </a:fontRef>
+        </p:style>
+        <p:txBody>
+          <a:bodyPr rtlCol="0" anchor="ctr"/>
+          <a:lstStyle/>
+          <a:p>
+            <a:pPr algn="ctr"/>
+          </a:p>
+        </p:txBody>
+      </p:sp>
+      <p:sp>
+        <p:nvSpPr>
+          <p:cNvPr id="61" name="TextBox 60"/>
+          <p:cNvSpPr txBox="1"/>
+          <p:nvPr/>
+        </p:nvSpPr>
+        <p:spPr>
+          <a:xfrm>
+            <a:off x="6577964" y="2416759"/>
+            <a:ext cx="246888" cy="155448"/>
+          </a:xfrm>
+          <a:prstGeom prst="rect">
+            <a:avLst/>
+          </a:prstGeom>
+          <a:noFill/>
+        </p:spPr>
+        <p:txBody>
+          <a:bodyPr wrap="square" lIns="0" rIns="0" tIns="0" bIns="0">
+            <a:spAutoFit/>
+          </a:bodyPr>
+          <a:lstStyle/>
+          <a:p>
+            <a:pPr algn="ctr">
+              <a:lnSpc>
+                <a:spcPct val="112000"/>
+              </a:lnSpc>
+            </a:pPr>
+            <a:r>
+              <a:rPr sz="800" b="1">
+                <a:solidFill>
+                  <a:srgbClr val="FFFFFF"/>
+                </a:solidFill>
+                <a:latin typeface="Arial"/>
+                <a:ea typeface="微软雅黑"/>
+                <a:cs typeface="微软雅黑"/>
+              </a:rPr>
+              <a:t>05</a:t>
+            </a:r>
+          </a:p>
+        </p:txBody>
+      </p:sp>
+      <p:sp>
+        <p:nvSpPr>
+          <p:cNvPr id="62" name="TextBox 61"/>
+          <p:cNvSpPr txBox="1"/>
+          <p:nvPr/>
+        </p:nvSpPr>
+        <p:spPr>
+          <a:xfrm>
+            <a:off x="6071615" y="2656332"/>
+            <a:ext cx="1259585" cy="219456"/>
+          </a:xfrm>
+          <a:prstGeom prst="rect">
+            <a:avLst/>
+          </a:prstGeom>
+          <a:noFill/>
+        </p:spPr>
+        <p:txBody>
+          <a:bodyPr wrap="square" lIns="0" rIns="0" tIns="0" bIns="0">
+            <a:spAutoFit/>
+          </a:bodyPr>
+          <a:lstStyle/>
+          <a:p>
+            <a:pPr algn="ctr">
+              <a:lnSpc>
+                <a:spcPct val="112000"/>
+              </a:lnSpc>
+            </a:pPr>
+            <a:r>
+              <a:rPr sz="1100" b="1">
+                <a:solidFill>
+                  <a:srgbClr val="C86A2E"/>
                 </a:solidFill>
                 <a:latin typeface="微软雅黑"/>
                 <a:ea typeface="微软雅黑"/>
@@ -4285,22 +5805,20 @@
       </p:sp>
       <p:sp>
         <p:nvSpPr>
-          <p:cNvPr id="30" name="Rounded Rectangle 29"/>
+          <p:cNvPr id="63" name="Rectangle 62"/>
           <p:cNvSpPr/>
           <p:nvPr/>
         </p:nvSpPr>
         <p:spPr>
           <a:xfrm>
-            <a:off x="2532888" y="2702051"/>
-            <a:ext cx="694944" cy="192024"/>
-          </a:xfrm>
-          <a:prstGeom prst="roundRect">
-            <a:avLst>
-              <a:gd name="adj" fmla="val 28000"/>
-            </a:avLst>
+            <a:off x="6545960" y="2894076"/>
+            <a:ext cx="310896" cy="18288"/>
+          </a:xfrm>
+          <a:prstGeom prst="rect">
+            <a:avLst/>
           </a:prstGeom>
           <a:solidFill>
-            <a:srgbClr val="FFFFFF"/>
+            <a:srgbClr val="D8E1EF"/>
           </a:solidFill>
           <a:ln>
             <a:noFill/>
@@ -4331,14 +5849,14 @@
       </p:sp>
       <p:sp>
         <p:nvSpPr>
-          <p:cNvPr id="31" name="TextBox 30"/>
+          <p:cNvPr id="64" name="TextBox 63"/>
           <p:cNvSpPr txBox="1"/>
           <p:nvPr/>
         </p:nvSpPr>
         <p:spPr>
           <a:xfrm>
-            <a:off x="2532888" y="2727655"/>
-            <a:ext cx="694944" cy="155448"/>
+            <a:off x="6089903" y="2958084"/>
+            <a:ext cx="1223010" cy="310896"/>
           </a:xfrm>
           <a:prstGeom prst="rect">
             <a:avLst/>
@@ -4353,13 +5871,340 @@
           <a:p>
             <a:pPr algn="ctr">
               <a:lnSpc>
-                <a:spcPct val="115000"/>
+                <a:spcPct val="116000"/>
+              </a:lnSpc>
+              <a:spcAft>
+                <a:spcPts val="0"/>
+              </a:spcAft>
+            </a:pPr>
+            <a:r>
+              <a:rPr sz="700">
+                <a:solidFill>
+                  <a:srgbClr val="606E84"/>
+                </a:solidFill>
+                <a:latin typeface="微软雅黑"/>
+                <a:ea typeface="微软雅黑"/>
+                <a:cs typeface="微软雅黑"/>
+              </a:rPr>
+              <a:t>SOP 一键生成数字人</a:t>
+            </a:r>
+          </a:p>
+          <a:p>
+            <a:pPr algn="ctr">
+              <a:lnSpc>
+                <a:spcPct val="116000"/>
+              </a:lnSpc>
+              <a:spcAft>
+                <a:spcPts val="0"/>
+              </a:spcAft>
+            </a:pPr>
+            <a:r>
+              <a:rPr sz="700">
+                <a:solidFill>
+                  <a:srgbClr val="606E84"/>
+                </a:solidFill>
+                <a:latin typeface="微软雅黑"/>
+                <a:ea typeface="微软雅黑"/>
+                <a:cs typeface="微软雅黑"/>
+              </a:rPr>
+              <a:t>讲解视频与配套考核</a:t>
+            </a:r>
+          </a:p>
+        </p:txBody>
+      </p:sp>
+      <p:sp>
+        <p:nvSpPr>
+          <p:cNvPr id="65" name="Rounded Rectangle 64"/>
+          <p:cNvSpPr/>
+          <p:nvPr/>
+        </p:nvSpPr>
+        <p:spPr>
+          <a:xfrm>
+            <a:off x="6103619" y="3278124"/>
+            <a:ext cx="1195578" cy="150876"/>
+          </a:xfrm>
+          <a:prstGeom prst="roundRect">
+            <a:avLst>
+              <a:gd name="adj" fmla="val 35000"/>
+            </a:avLst>
+          </a:prstGeom>
+          <a:solidFill>
+            <a:srgbClr val="F7EAE2"/>
+          </a:solidFill>
+          <a:ln>
+            <a:noFill/>
+          </a:ln>
+          <a:effectLst/>
+        </p:spPr>
+        <p:style>
+          <a:lnRef idx="1">
+            <a:schemeClr val="accent1"/>
+          </a:lnRef>
+          <a:fillRef idx="3">
+            <a:schemeClr val="accent1"/>
+          </a:fillRef>
+          <a:effectRef idx="2">
+            <a:schemeClr val="accent1"/>
+          </a:effectRef>
+          <a:fontRef idx="minor">
+            <a:schemeClr val="lt1"/>
+          </a:fontRef>
+        </p:style>
+        <p:txBody>
+          <a:bodyPr rtlCol="0" anchor="ctr"/>
+          <a:lstStyle/>
+          <a:p>
+            <a:pPr algn="ctr"/>
+          </a:p>
+        </p:txBody>
+      </p:sp>
+      <p:sp>
+        <p:nvSpPr>
+          <p:cNvPr id="66" name="TextBox 65"/>
+          <p:cNvSpPr txBox="1"/>
+          <p:nvPr/>
+        </p:nvSpPr>
+        <p:spPr>
+          <a:xfrm>
+            <a:off x="6103619" y="3302812"/>
+            <a:ext cx="1195578" cy="128016"/>
+          </a:xfrm>
+          <a:prstGeom prst="rect">
+            <a:avLst/>
+          </a:prstGeom>
+          <a:noFill/>
+        </p:spPr>
+        <p:txBody>
+          <a:bodyPr wrap="square" lIns="0" rIns="0" tIns="0" bIns="0">
+            <a:spAutoFit/>
+          </a:bodyPr>
+          <a:lstStyle/>
+          <a:p>
+            <a:pPr algn="ctr">
+              <a:lnSpc>
+                <a:spcPct val="112000"/>
               </a:lnSpc>
             </a:pPr>
             <a:r>
-              <a:rPr sz="750" b="1">
+              <a:rPr sz="680" b="1">
                 <a:solidFill>
-                  <a:srgbClr val="2E5FA0"/>
+                  <a:srgbClr val="C86A2E"/>
+                </a:solidFill>
+                <a:latin typeface="微软雅黑"/>
+                <a:ea typeface="微软雅黑"/>
+                <a:cs typeface="微软雅黑"/>
+              </a:rPr>
+              <a:t>2 周 → 1 天</a:t>
+            </a:r>
+          </a:p>
+        </p:txBody>
+      </p:sp>
+      <p:sp>
+        <p:nvSpPr>
+          <p:cNvPr id="67" name="Rectangle 66"/>
+          <p:cNvSpPr/>
+          <p:nvPr/>
+        </p:nvSpPr>
+        <p:spPr>
+          <a:xfrm>
+            <a:off x="7445502" y="2267712"/>
+            <a:ext cx="1351025" cy="1188720"/>
+          </a:xfrm>
+          <a:prstGeom prst="rect">
+            <a:avLst/>
+          </a:prstGeom>
+          <a:solidFill>
+            <a:srgbClr val="FFFFFF"/>
+          </a:solidFill>
+          <a:ln w="9525">
+            <a:solidFill>
+              <a:srgbClr val="D8E1EF"/>
+            </a:solidFill>
+          </a:ln>
+          <a:effectLst/>
+        </p:spPr>
+        <p:style>
+          <a:lnRef idx="1">
+            <a:schemeClr val="accent1"/>
+          </a:lnRef>
+          <a:fillRef idx="3">
+            <a:schemeClr val="accent1"/>
+          </a:fillRef>
+          <a:effectRef idx="2">
+            <a:schemeClr val="accent1"/>
+          </a:effectRef>
+          <a:fontRef idx="minor">
+            <a:schemeClr val="lt1"/>
+          </a:fontRef>
+        </p:style>
+        <p:txBody>
+          <a:bodyPr rtlCol="0" anchor="ctr"/>
+          <a:lstStyle/>
+          <a:p>
+            <a:pPr algn="ctr"/>
+          </a:p>
+        </p:txBody>
+      </p:sp>
+      <p:sp>
+        <p:nvSpPr>
+          <p:cNvPr id="68" name="Rectangle 67"/>
+          <p:cNvSpPr/>
+          <p:nvPr/>
+        </p:nvSpPr>
+        <p:spPr>
+          <a:xfrm>
+            <a:off x="7445502" y="2267712"/>
+            <a:ext cx="1351025" cy="41148"/>
+          </a:xfrm>
+          <a:prstGeom prst="rect">
+            <a:avLst/>
+          </a:prstGeom>
+          <a:solidFill>
+            <a:srgbClr val="FF7E3D"/>
+          </a:solidFill>
+          <a:ln>
+            <a:noFill/>
+          </a:ln>
+          <a:effectLst/>
+        </p:spPr>
+        <p:style>
+          <a:lnRef idx="1">
+            <a:schemeClr val="accent1"/>
+          </a:lnRef>
+          <a:fillRef idx="3">
+            <a:schemeClr val="accent1"/>
+          </a:fillRef>
+          <a:effectRef idx="2">
+            <a:schemeClr val="accent1"/>
+          </a:effectRef>
+          <a:fontRef idx="minor">
+            <a:schemeClr val="lt1"/>
+          </a:fontRef>
+        </p:style>
+        <p:txBody>
+          <a:bodyPr rtlCol="0" anchor="ctr"/>
+          <a:lstStyle/>
+          <a:p>
+            <a:pPr algn="ctr"/>
+          </a:p>
+        </p:txBody>
+      </p:sp>
+      <p:sp>
+        <p:nvSpPr>
+          <p:cNvPr id="69" name="Oval 68"/>
+          <p:cNvSpPr/>
+          <p:nvPr/>
+        </p:nvSpPr>
+        <p:spPr>
+          <a:xfrm>
+            <a:off x="7997571" y="2372868"/>
+            <a:ext cx="246888" cy="246888"/>
+          </a:xfrm>
+          <a:prstGeom prst="ellipse">
+            <a:avLst/>
+          </a:prstGeom>
+          <a:solidFill>
+            <a:srgbClr val="FF7E3D"/>
+          </a:solidFill>
+          <a:ln>
+            <a:noFill/>
+          </a:ln>
+          <a:effectLst/>
+        </p:spPr>
+        <p:style>
+          <a:lnRef idx="1">
+            <a:schemeClr val="accent1"/>
+          </a:lnRef>
+          <a:fillRef idx="3">
+            <a:schemeClr val="accent1"/>
+          </a:fillRef>
+          <a:effectRef idx="2">
+            <a:schemeClr val="accent1"/>
+          </a:effectRef>
+          <a:fontRef idx="minor">
+            <a:schemeClr val="lt1"/>
+          </a:fontRef>
+        </p:style>
+        <p:txBody>
+          <a:bodyPr rtlCol="0" anchor="ctr"/>
+          <a:lstStyle/>
+          <a:p>
+            <a:pPr algn="ctr"/>
+          </a:p>
+        </p:txBody>
+      </p:sp>
+      <p:sp>
+        <p:nvSpPr>
+          <p:cNvPr id="70" name="TextBox 69"/>
+          <p:cNvSpPr txBox="1"/>
+          <p:nvPr/>
+        </p:nvSpPr>
+        <p:spPr>
+          <a:xfrm>
+            <a:off x="7997571" y="2416759"/>
+            <a:ext cx="246888" cy="155448"/>
+          </a:xfrm>
+          <a:prstGeom prst="rect">
+            <a:avLst/>
+          </a:prstGeom>
+          <a:noFill/>
+        </p:spPr>
+        <p:txBody>
+          <a:bodyPr wrap="square" lIns="0" rIns="0" tIns="0" bIns="0">
+            <a:spAutoFit/>
+          </a:bodyPr>
+          <a:lstStyle/>
+          <a:p>
+            <a:pPr algn="ctr">
+              <a:lnSpc>
+                <a:spcPct val="112000"/>
+              </a:lnSpc>
+            </a:pPr>
+            <a:r>
+              <a:rPr sz="800" b="1">
+                <a:solidFill>
+                  <a:srgbClr val="FFFFFF"/>
+                </a:solidFill>
+                <a:latin typeface="Arial"/>
+                <a:ea typeface="微软雅黑"/>
+                <a:cs typeface="微软雅黑"/>
+              </a:rPr>
+              <a:t>06</a:t>
+            </a:r>
+          </a:p>
+        </p:txBody>
+      </p:sp>
+      <p:sp>
+        <p:nvSpPr>
+          <p:cNvPr id="71" name="TextBox 70"/>
+          <p:cNvSpPr txBox="1"/>
+          <p:nvPr/>
+        </p:nvSpPr>
+        <p:spPr>
+          <a:xfrm>
+            <a:off x="7491222" y="2656332"/>
+            <a:ext cx="1259585" cy="219456"/>
+          </a:xfrm>
+          <a:prstGeom prst="rect">
+            <a:avLst/>
+          </a:prstGeom>
+          <a:noFill/>
+        </p:spPr>
+        <p:txBody>
+          <a:bodyPr wrap="square" lIns="0" rIns="0" tIns="0" bIns="0">
+            <a:spAutoFit/>
+          </a:bodyPr>
+          <a:lstStyle/>
+          <a:p>
+            <a:pPr algn="ctr">
+              <a:lnSpc>
+                <a:spcPct val="112000"/>
+              </a:lnSpc>
+            </a:pPr>
+            <a:r>
+              <a:rPr sz="1100" b="1">
+                <a:solidFill>
+                  <a:srgbClr val="FF7E3D"/>
                 </a:solidFill>
                 <a:latin typeface="微软雅黑"/>
                 <a:ea typeface="微软雅黑"/>
@@ -4372,14 +6217,58 @@
       </p:sp>
       <p:sp>
         <p:nvSpPr>
-          <p:cNvPr id="32" name="TextBox 31"/>
+          <p:cNvPr id="72" name="Rectangle 71"/>
+          <p:cNvSpPr/>
+          <p:nvPr/>
+        </p:nvSpPr>
+        <p:spPr>
+          <a:xfrm>
+            <a:off x="7965567" y="2894076"/>
+            <a:ext cx="310896" cy="18288"/>
+          </a:xfrm>
+          <a:prstGeom prst="rect">
+            <a:avLst/>
+          </a:prstGeom>
+          <a:solidFill>
+            <a:srgbClr val="D8E1EF"/>
+          </a:solidFill>
+          <a:ln>
+            <a:noFill/>
+          </a:ln>
+          <a:effectLst/>
+        </p:spPr>
+        <p:style>
+          <a:lnRef idx="1">
+            <a:schemeClr val="accent1"/>
+          </a:lnRef>
+          <a:fillRef idx="3">
+            <a:schemeClr val="accent1"/>
+          </a:fillRef>
+          <a:effectRef idx="2">
+            <a:schemeClr val="accent1"/>
+          </a:effectRef>
+          <a:fontRef idx="minor">
+            <a:schemeClr val="lt1"/>
+          </a:fontRef>
+        </p:style>
+        <p:txBody>
+          <a:bodyPr rtlCol="0" anchor="ctr"/>
+          <a:lstStyle/>
+          <a:p>
+            <a:pPr algn="ctr"/>
+          </a:p>
+        </p:txBody>
+      </p:sp>
+      <p:sp>
+        <p:nvSpPr>
+          <p:cNvPr id="73" name="TextBox 72"/>
           <p:cNvSpPr txBox="1"/>
           <p:nvPr/>
         </p:nvSpPr>
         <p:spPr>
           <a:xfrm>
-            <a:off x="3364991" y="2487168"/>
-            <a:ext cx="1737360" cy="310896"/>
+            <a:off x="7509510" y="2958084"/>
+            <a:ext cx="1223010" cy="310896"/>
           </a:xfrm>
           <a:prstGeom prst="rect">
             <a:avLst/>
@@ -4392,36 +6281,278 @@
           </a:bodyPr>
           <a:lstStyle/>
           <a:p>
-            <a:pPr algn="l">
+            <a:pPr algn="ctr">
               <a:lnSpc>
-                <a:spcPct val="125000"/>
+                <a:spcPct val="116000"/>
               </a:lnSpc>
+              <a:spcAft>
+                <a:spcPts val="0"/>
+              </a:spcAft>
             </a:pPr>
             <a:r>
-              <a:rPr sz="700" b="0">
+              <a:rPr sz="700">
                 <a:solidFill>
-                  <a:srgbClr val="CFDEF4"/>
+                  <a:srgbClr val="606E84"/>
                 </a:solidFill>
                 <a:latin typeface="微软雅黑"/>
                 <a:ea typeface="微软雅黑"/>
                 <a:cs typeface="微软雅黑"/>
               </a:rPr>
-              <a:t>逐项形成落地方案
-场景可独立立项、可组合推进</a:t>
-            </a:r>
-          </a:p>
-        </p:txBody>
-      </p:sp>
-      <p:sp>
-        <p:nvSpPr>
-          <p:cNvPr id="33" name="Rectangle 32"/>
+              <a:t>批次质量预测 + 报告</a:t>
+            </a:r>
+          </a:p>
+          <a:p>
+            <a:pPr algn="ctr">
+              <a:lnSpc>
+                <a:spcPct val="116000"/>
+              </a:lnSpc>
+              <a:spcAft>
+                <a:spcPts val="0"/>
+              </a:spcAft>
+            </a:pPr>
+            <a:r>
+              <a:rPr sz="700">
+                <a:solidFill>
+                  <a:srgbClr val="606E84"/>
+                </a:solidFill>
+                <a:latin typeface="微软雅黑"/>
+                <a:ea typeface="微软雅黑"/>
+                <a:cs typeface="微软雅黑"/>
+              </a:rPr>
+              <a:t>起草，BDCT 能力升级</a:t>
+            </a:r>
+          </a:p>
+        </p:txBody>
+      </p:sp>
+      <p:sp>
+        <p:nvSpPr>
+          <p:cNvPr id="74" name="Rounded Rectangle 73"/>
           <p:cNvSpPr/>
           <p:nvPr/>
         </p:nvSpPr>
         <p:spPr>
           <a:xfrm>
-            <a:off x="347472" y="2907791"/>
-            <a:ext cx="4846320" cy="731520"/>
+            <a:off x="7523226" y="3278124"/>
+            <a:ext cx="1195578" cy="150876"/>
+          </a:xfrm>
+          <a:prstGeom prst="roundRect">
+            <a:avLst>
+              <a:gd name="adj" fmla="val 35000"/>
+            </a:avLst>
+          </a:prstGeom>
+          <a:solidFill>
+            <a:srgbClr val="FFEDE4"/>
+          </a:solidFill>
+          <a:ln>
+            <a:noFill/>
+          </a:ln>
+          <a:effectLst/>
+        </p:spPr>
+        <p:style>
+          <a:lnRef idx="1">
+            <a:schemeClr val="accent1"/>
+          </a:lnRef>
+          <a:fillRef idx="3">
+            <a:schemeClr val="accent1"/>
+          </a:fillRef>
+          <a:effectRef idx="2">
+            <a:schemeClr val="accent1"/>
+          </a:effectRef>
+          <a:fontRef idx="minor">
+            <a:schemeClr val="lt1"/>
+          </a:fontRef>
+        </p:style>
+        <p:txBody>
+          <a:bodyPr rtlCol="0" anchor="ctr"/>
+          <a:lstStyle/>
+          <a:p>
+            <a:pPr algn="ctr"/>
+          </a:p>
+        </p:txBody>
+      </p:sp>
+      <p:sp>
+        <p:nvSpPr>
+          <p:cNvPr id="75" name="TextBox 74"/>
+          <p:cNvSpPr txBox="1"/>
+          <p:nvPr/>
+        </p:nvSpPr>
+        <p:spPr>
+          <a:xfrm>
+            <a:off x="7523226" y="3302812"/>
+            <a:ext cx="1195578" cy="128016"/>
+          </a:xfrm>
+          <a:prstGeom prst="rect">
+            <a:avLst/>
+          </a:prstGeom>
+          <a:noFill/>
+        </p:spPr>
+        <p:txBody>
+          <a:bodyPr wrap="square" lIns="0" rIns="0" tIns="0" bIns="0">
+            <a:spAutoFit/>
+          </a:bodyPr>
+          <a:lstStyle/>
+          <a:p>
+            <a:pPr algn="ctr">
+              <a:lnSpc>
+                <a:spcPct val="112000"/>
+              </a:lnSpc>
+            </a:pPr>
+            <a:r>
+              <a:rPr sz="680" b="1">
+                <a:solidFill>
+                  <a:srgbClr val="FF7E3D"/>
+                </a:solidFill>
+                <a:latin typeface="微软雅黑"/>
+                <a:ea typeface="微软雅黑"/>
+                <a:cs typeface="微软雅黑"/>
+              </a:rPr>
+              <a:t>放行加速 · 风险前置</a:t>
+            </a:r>
+          </a:p>
+        </p:txBody>
+      </p:sp>
+      <p:sp>
+        <p:nvSpPr>
+          <p:cNvPr id="76" name="Isosceles Triangle 75"/>
+          <p:cNvSpPr/>
+          <p:nvPr/>
+        </p:nvSpPr>
+        <p:spPr>
+          <a:xfrm>
+            <a:off x="2084831" y="3497580"/>
+            <a:ext cx="100584" cy="68580"/>
+          </a:xfrm>
+          <a:prstGeom prst="triangle">
+            <a:avLst/>
+          </a:prstGeom>
+          <a:solidFill>
+            <a:srgbClr val="B4C7E4"/>
+          </a:solidFill>
+          <a:ln>
+            <a:noFill/>
+          </a:ln>
+          <a:effectLst/>
+        </p:spPr>
+        <p:style>
+          <a:lnRef idx="1">
+            <a:schemeClr val="accent1"/>
+          </a:lnRef>
+          <a:fillRef idx="3">
+            <a:schemeClr val="accent1"/>
+          </a:fillRef>
+          <a:effectRef idx="2">
+            <a:schemeClr val="accent1"/>
+          </a:effectRef>
+          <a:fontRef idx="minor">
+            <a:schemeClr val="lt1"/>
+          </a:fontRef>
+        </p:style>
+        <p:txBody>
+          <a:bodyPr rtlCol="0" anchor="ctr"/>
+          <a:lstStyle/>
+          <a:p>
+            <a:pPr algn="ctr"/>
+          </a:p>
+        </p:txBody>
+      </p:sp>
+      <p:sp>
+        <p:nvSpPr>
+          <p:cNvPr id="77" name="Isosceles Triangle 76"/>
+          <p:cNvSpPr/>
+          <p:nvPr/>
+        </p:nvSpPr>
+        <p:spPr>
+          <a:xfrm>
+            <a:off x="4462272" y="3497580"/>
+            <a:ext cx="100584" cy="68580"/>
+          </a:xfrm>
+          <a:prstGeom prst="triangle">
+            <a:avLst/>
+          </a:prstGeom>
+          <a:solidFill>
+            <a:srgbClr val="B4C7E4"/>
+          </a:solidFill>
+          <a:ln>
+            <a:noFill/>
+          </a:ln>
+          <a:effectLst/>
+        </p:spPr>
+        <p:style>
+          <a:lnRef idx="1">
+            <a:schemeClr val="accent1"/>
+          </a:lnRef>
+          <a:fillRef idx="3">
+            <a:schemeClr val="accent1"/>
+          </a:fillRef>
+          <a:effectRef idx="2">
+            <a:schemeClr val="accent1"/>
+          </a:effectRef>
+          <a:fontRef idx="minor">
+            <a:schemeClr val="lt1"/>
+          </a:fontRef>
+        </p:style>
+        <p:txBody>
+          <a:bodyPr rtlCol="0" anchor="ctr"/>
+          <a:lstStyle/>
+          <a:p>
+            <a:pPr algn="ctr"/>
+          </a:p>
+        </p:txBody>
+      </p:sp>
+      <p:sp>
+        <p:nvSpPr>
+          <p:cNvPr id="78" name="Isosceles Triangle 77"/>
+          <p:cNvSpPr/>
+          <p:nvPr/>
+        </p:nvSpPr>
+        <p:spPr>
+          <a:xfrm>
+            <a:off x="6839712" y="3497580"/>
+            <a:ext cx="100584" cy="68580"/>
+          </a:xfrm>
+          <a:prstGeom prst="triangle">
+            <a:avLst/>
+          </a:prstGeom>
+          <a:solidFill>
+            <a:srgbClr val="B4C7E4"/>
+          </a:solidFill>
+          <a:ln>
+            <a:noFill/>
+          </a:ln>
+          <a:effectLst/>
+        </p:spPr>
+        <p:style>
+          <a:lnRef idx="1">
+            <a:schemeClr val="accent1"/>
+          </a:lnRef>
+          <a:fillRef idx="3">
+            <a:schemeClr val="accent1"/>
+          </a:fillRef>
+          <a:effectRef idx="2">
+            <a:schemeClr val="accent1"/>
+          </a:effectRef>
+          <a:fontRef idx="minor">
+            <a:schemeClr val="lt1"/>
+          </a:fontRef>
+        </p:style>
+        <p:txBody>
+          <a:bodyPr rtlCol="0" anchor="ctr"/>
+          <a:lstStyle/>
+          <a:p>
+            <a:pPr algn="ctr"/>
+          </a:p>
+        </p:txBody>
+      </p:sp>
+      <p:sp>
+        <p:nvSpPr>
+          <p:cNvPr id="79" name="Rectangle 78"/>
+          <p:cNvSpPr/>
+          <p:nvPr/>
+        </p:nvSpPr>
+        <p:spPr>
+          <a:xfrm>
+            <a:off x="347472" y="3602736"/>
+            <a:ext cx="8449055" cy="420624"/>
           </a:xfrm>
           <a:prstGeom prst="rect">
             <a:avLst/>
@@ -4429,10 +6560,10 @@
           <a:gradFill rotWithShape="1">
             <a:gsLst>
               <a:gs pos="0">
-                <a:srgbClr val="00366A"/>
+                <a:srgbClr val="00224A"/>
               </a:gs>
               <a:gs pos="100000">
-                <a:srgbClr val="1E4E86"/>
+                <a:srgbClr val="2A5A96"/>
               </a:gs>
             </a:gsLst>
             <a:lin ang="0" scaled="0"/>
@@ -4466,14 +6597,14 @@
       </p:sp>
       <p:sp>
         <p:nvSpPr>
-          <p:cNvPr id="34" name="Rectangle 33"/>
+          <p:cNvPr id="80" name="Rectangle 79"/>
           <p:cNvSpPr/>
           <p:nvPr/>
         </p:nvSpPr>
         <p:spPr>
           <a:xfrm>
-            <a:off x="347472" y="2907791"/>
-            <a:ext cx="548640" cy="731520"/>
+            <a:off x="347472" y="3602736"/>
+            <a:ext cx="512064" cy="420624"/>
           </a:xfrm>
           <a:prstGeom prst="rect">
             <a:avLst/>
@@ -4510,14 +6641,14 @@
       </p:sp>
       <p:sp>
         <p:nvSpPr>
-          <p:cNvPr id="35" name="TextBox 34"/>
+          <p:cNvPr id="81" name="TextBox 80"/>
           <p:cNvSpPr txBox="1"/>
           <p:nvPr/>
         </p:nvSpPr>
         <p:spPr>
           <a:xfrm>
-            <a:off x="347472" y="3044951"/>
-            <a:ext cx="548640" cy="274320"/>
+            <a:off x="347472" y="3653028"/>
+            <a:ext cx="512064" cy="219456"/>
           </a:xfrm>
           <a:prstGeom prst="rect">
             <a:avLst/>
@@ -4532,11 +6663,11 @@
           <a:p>
             <a:pPr algn="ctr">
               <a:lnSpc>
-                <a:spcPct val="115000"/>
+                <a:spcPct val="112000"/>
               </a:lnSpc>
             </a:pPr>
             <a:r>
-              <a:rPr sz="1700" b="1">
+              <a:rPr sz="1500" b="1">
                 <a:solidFill>
                   <a:srgbClr val="00366A"/>
                 </a:solidFill>
@@ -4551,14 +6682,14 @@
       </p:sp>
       <p:sp>
         <p:nvSpPr>
-          <p:cNvPr id="36" name="TextBox 35"/>
+          <p:cNvPr id="82" name="TextBox 81"/>
           <p:cNvSpPr txBox="1"/>
           <p:nvPr/>
         </p:nvSpPr>
         <p:spPr>
           <a:xfrm>
-            <a:off x="347472" y="3364991"/>
-            <a:ext cx="548640" cy="164592"/>
+            <a:off x="347472" y="3867911"/>
+            <a:ext cx="512064" cy="128016"/>
           </a:xfrm>
           <a:prstGeom prst="rect">
             <a:avLst/>
@@ -4573,13 +6704,13 @@
           <a:p>
             <a:pPr algn="ctr">
               <a:lnSpc>
-                <a:spcPct val="115000"/>
+                <a:spcPct val="112000"/>
               </a:lnSpc>
             </a:pPr>
             <a:r>
-              <a:rPr sz="550" b="1">
+              <a:rPr sz="459" b="1">
                 <a:solidFill>
-                  <a:srgbClr val="6B7A90"/>
+                  <a:srgbClr val="606E84"/>
                 </a:solidFill>
                 <a:latin typeface="Arial"/>
                 <a:ea typeface="微软雅黑"/>
@@ -4592,14 +6723,14 @@
       </p:sp>
       <p:sp>
         <p:nvSpPr>
-          <p:cNvPr id="37" name="TextBox 36"/>
+          <p:cNvPr id="83" name="TextBox 82"/>
           <p:cNvSpPr txBox="1"/>
           <p:nvPr/>
         </p:nvSpPr>
         <p:spPr>
           <a:xfrm>
-            <a:off x="1024128" y="2999232"/>
-            <a:ext cx="1417320" cy="237744"/>
+            <a:off x="987552" y="3653028"/>
+            <a:ext cx="2194560" cy="219456"/>
           </a:xfrm>
           <a:prstGeom prst="rect">
             <a:avLst/>
@@ -4607,14 +6738,14 @@
           <a:noFill/>
         </p:spPr>
         <p:txBody>
-          <a:bodyPr wrap="square" lIns="0" rIns="0" tIns="0" bIns="0">
+          <a:bodyPr wrap="square" lIns="0" rIns="0" tIns="0" bIns="0" anchor="ctr">
             <a:spAutoFit/>
           </a:bodyPr>
           <a:lstStyle/>
           <a:p>
             <a:pPr algn="l">
               <a:lnSpc>
-                <a:spcPct val="115000"/>
+                <a:spcPct val="112000"/>
               </a:lnSpc>
             </a:pPr>
             <a:r>
@@ -4633,14 +6764,14 @@
       </p:sp>
       <p:sp>
         <p:nvSpPr>
-          <p:cNvPr id="38" name="TextBox 37"/>
+          <p:cNvPr id="84" name="TextBox 83"/>
           <p:cNvSpPr txBox="1"/>
           <p:nvPr/>
         </p:nvSpPr>
         <p:spPr>
           <a:xfrm>
-            <a:off x="2505456" y="3017520"/>
-            <a:ext cx="2606040" cy="201168"/>
+            <a:off x="2862072" y="3671315"/>
+            <a:ext cx="3108960" cy="201168"/>
           </a:xfrm>
           <a:prstGeom prst="rect">
             <a:avLst/>
@@ -4655,11 +6786,11 @@
           <a:p>
             <a:pPr algn="l">
               <a:lnSpc>
-                <a:spcPct val="115000"/>
+                <a:spcPct val="112000"/>
               </a:lnSpc>
             </a:pPr>
             <a:r>
-              <a:rPr sz="800" b="1">
+              <a:rPr sz="900" b="1">
                 <a:solidFill>
                   <a:srgbClr val="E4EEFB"/>
                 </a:solidFill>
@@ -4667,21 +6798,21 @@
                 <a:ea typeface="微软雅黑"/>
                 <a:cs typeface="微软雅黑"/>
               </a:rPr>
-              <a:t>数据打通  ·  知识图谱  ·  算力与合规框架</a:t>
-            </a:r>
-          </a:p>
-        </p:txBody>
-      </p:sp>
-      <p:sp>
-        <p:nvSpPr>
-          <p:cNvPr id="39" name="TextBox 38"/>
+              <a:t>数据打通 · 知识图谱 · 算力与合规框架</a:t>
+            </a:r>
+          </a:p>
+        </p:txBody>
+      </p:sp>
+      <p:sp>
+        <p:nvSpPr>
+          <p:cNvPr id="85" name="TextBox 84"/>
           <p:cNvSpPr txBox="1"/>
           <p:nvPr/>
         </p:nvSpPr>
         <p:spPr>
           <a:xfrm>
-            <a:off x="1024128" y="3328415"/>
-            <a:ext cx="4041648" cy="256032"/>
+            <a:off x="987552" y="3854196"/>
+            <a:ext cx="7498079" cy="164592"/>
           </a:xfrm>
           <a:prstGeom prst="rect">
             <a:avLst/>
@@ -4696,39 +6827,39 @@
           <a:p>
             <a:pPr algn="l">
               <a:lnSpc>
-                <a:spcPct val="115000"/>
+                <a:spcPct val="112000"/>
               </a:lnSpc>
             </a:pPr>
             <a:r>
               <a:rPr sz="780" b="0">
                 <a:solidFill>
-                  <a:srgbClr val="CFDEF4"/>
+                  <a:srgbClr val="C9DAF2"/>
                 </a:solidFill>
                 <a:latin typeface="微软雅黑"/>
                 <a:ea typeface="微软雅黑"/>
                 <a:cs typeface="微软雅黑"/>
               </a:rPr>
-              <a:t>MES / QMS / LIMS / EAM 数据贯通  ·  专家经验结构化  ·  GxP 验证路径</a:t>
-            </a:r>
-          </a:p>
-        </p:txBody>
-      </p:sp>
-      <p:sp>
-        <p:nvSpPr>
-          <p:cNvPr id="40" name="Isosceles Triangle 39"/>
+              <a:t>MES / QMS / LIMS / EAM 跨系统贯通   ·   专家经验与故障案例结构化   ·   GxP 验证路径与客户数据隔离</a:t>
+            </a:r>
+          </a:p>
+        </p:txBody>
+      </p:sp>
+      <p:sp>
+        <p:nvSpPr>
+          <p:cNvPr id="86" name="Rectangle 85"/>
           <p:cNvSpPr/>
           <p:nvPr/>
         </p:nvSpPr>
         <p:spPr>
           <a:xfrm>
-            <a:off x="1947672" y="2040940"/>
-            <a:ext cx="82296" cy="59436"/>
-          </a:xfrm>
-          <a:prstGeom prst="triangle">
+            <a:off x="347472" y="4224528"/>
+            <a:ext cx="8449055" cy="20116"/>
+          </a:xfrm>
+          <a:prstGeom prst="rect">
             <a:avLst/>
           </a:prstGeom>
           <a:solidFill>
-            <a:srgbClr val="B9CBE6"/>
+            <a:srgbClr val="D8E1EF"/>
           </a:solidFill>
           <a:ln>
             <a:noFill/>
@@ -4759,1165 +6890,14 @@
       </p:sp>
       <p:sp>
         <p:nvSpPr>
-          <p:cNvPr id="41" name="Isosceles Triangle 40"/>
+          <p:cNvPr id="87" name="Oval 86"/>
           <p:cNvSpPr/>
           <p:nvPr/>
         </p:nvSpPr>
         <p:spPr>
           <a:xfrm>
-            <a:off x="1947672" y="2845612"/>
-            <a:ext cx="82296" cy="59436"/>
-          </a:xfrm>
-          <a:prstGeom prst="triangle">
-            <a:avLst/>
-          </a:prstGeom>
-          <a:solidFill>
-            <a:srgbClr val="B9CBE6"/>
-          </a:solidFill>
-          <a:ln>
-            <a:noFill/>
-          </a:ln>
-          <a:effectLst/>
-        </p:spPr>
-        <p:style>
-          <a:lnRef idx="1">
-            <a:schemeClr val="accent1"/>
-          </a:lnRef>
-          <a:fillRef idx="3">
-            <a:schemeClr val="accent1"/>
-          </a:fillRef>
-          <a:effectRef idx="2">
-            <a:schemeClr val="accent1"/>
-          </a:effectRef>
-          <a:fontRef idx="minor">
-            <a:schemeClr val="lt1"/>
-          </a:fontRef>
-        </p:style>
-        <p:txBody>
-          <a:bodyPr rtlCol="0" anchor="ctr"/>
-          <a:lstStyle/>
-          <a:p>
-            <a:pPr algn="ctr"/>
-          </a:p>
-        </p:txBody>
-      </p:sp>
-      <p:sp>
-        <p:nvSpPr>
-          <p:cNvPr id="42" name="Isosceles Triangle 41"/>
-          <p:cNvSpPr/>
-          <p:nvPr/>
-        </p:nvSpPr>
-        <p:spPr>
-          <a:xfrm>
-            <a:off x="3227832" y="2040940"/>
-            <a:ext cx="82296" cy="59436"/>
-          </a:xfrm>
-          <a:prstGeom prst="triangle">
-            <a:avLst/>
-          </a:prstGeom>
-          <a:solidFill>
-            <a:srgbClr val="B9CBE6"/>
-          </a:solidFill>
-          <a:ln>
-            <a:noFill/>
-          </a:ln>
-          <a:effectLst/>
-        </p:spPr>
-        <p:style>
-          <a:lnRef idx="1">
-            <a:schemeClr val="accent1"/>
-          </a:lnRef>
-          <a:fillRef idx="3">
-            <a:schemeClr val="accent1"/>
-          </a:fillRef>
-          <a:effectRef idx="2">
-            <a:schemeClr val="accent1"/>
-          </a:effectRef>
-          <a:fontRef idx="minor">
-            <a:schemeClr val="lt1"/>
-          </a:fontRef>
-        </p:style>
-        <p:txBody>
-          <a:bodyPr rtlCol="0" anchor="ctr"/>
-          <a:lstStyle/>
-          <a:p>
-            <a:pPr algn="ctr"/>
-          </a:p>
-        </p:txBody>
-      </p:sp>
-      <p:sp>
-        <p:nvSpPr>
-          <p:cNvPr id="43" name="Isosceles Triangle 42"/>
-          <p:cNvSpPr/>
-          <p:nvPr/>
-        </p:nvSpPr>
-        <p:spPr>
-          <a:xfrm>
-            <a:off x="3227832" y="2845612"/>
-            <a:ext cx="82296" cy="59436"/>
-          </a:xfrm>
-          <a:prstGeom prst="triangle">
-            <a:avLst/>
-          </a:prstGeom>
-          <a:solidFill>
-            <a:srgbClr val="B9CBE6"/>
-          </a:solidFill>
-          <a:ln>
-            <a:noFill/>
-          </a:ln>
-          <a:effectLst/>
-        </p:spPr>
-        <p:style>
-          <a:lnRef idx="1">
-            <a:schemeClr val="accent1"/>
-          </a:lnRef>
-          <a:fillRef idx="3">
-            <a:schemeClr val="accent1"/>
-          </a:fillRef>
-          <a:effectRef idx="2">
-            <a:schemeClr val="accent1"/>
-          </a:effectRef>
-          <a:fontRef idx="minor">
-            <a:schemeClr val="lt1"/>
-          </a:fontRef>
-        </p:style>
-        <p:txBody>
-          <a:bodyPr rtlCol="0" anchor="ctr"/>
-          <a:lstStyle/>
-          <a:p>
-            <a:pPr algn="ctr"/>
-          </a:p>
-        </p:txBody>
-      </p:sp>
-      <p:sp>
-        <p:nvSpPr>
-          <p:cNvPr id="44" name="Isosceles Triangle 43"/>
-          <p:cNvSpPr/>
-          <p:nvPr/>
-        </p:nvSpPr>
-        <p:spPr>
-          <a:xfrm>
-            <a:off x="4507992" y="2040940"/>
-            <a:ext cx="82296" cy="59436"/>
-          </a:xfrm>
-          <a:prstGeom prst="triangle">
-            <a:avLst/>
-          </a:prstGeom>
-          <a:solidFill>
-            <a:srgbClr val="B9CBE6"/>
-          </a:solidFill>
-          <a:ln>
-            <a:noFill/>
-          </a:ln>
-          <a:effectLst/>
-        </p:spPr>
-        <p:style>
-          <a:lnRef idx="1">
-            <a:schemeClr val="accent1"/>
-          </a:lnRef>
-          <a:fillRef idx="3">
-            <a:schemeClr val="accent1"/>
-          </a:fillRef>
-          <a:effectRef idx="2">
-            <a:schemeClr val="accent1"/>
-          </a:effectRef>
-          <a:fontRef idx="minor">
-            <a:schemeClr val="lt1"/>
-          </a:fontRef>
-        </p:style>
-        <p:txBody>
-          <a:bodyPr rtlCol="0" anchor="ctr"/>
-          <a:lstStyle/>
-          <a:p>
-            <a:pPr algn="ctr"/>
-          </a:p>
-        </p:txBody>
-      </p:sp>
-      <p:sp>
-        <p:nvSpPr>
-          <p:cNvPr id="45" name="Isosceles Triangle 44"/>
-          <p:cNvSpPr/>
-          <p:nvPr/>
-        </p:nvSpPr>
-        <p:spPr>
-          <a:xfrm>
-            <a:off x="4507992" y="2845612"/>
-            <a:ext cx="82296" cy="59436"/>
-          </a:xfrm>
-          <a:prstGeom prst="triangle">
-            <a:avLst/>
-          </a:prstGeom>
-          <a:solidFill>
-            <a:srgbClr val="B9CBE6"/>
-          </a:solidFill>
-          <a:ln>
-            <a:noFill/>
-          </a:ln>
-          <a:effectLst/>
-        </p:spPr>
-        <p:style>
-          <a:lnRef idx="1">
-            <a:schemeClr val="accent1"/>
-          </a:lnRef>
-          <a:fillRef idx="3">
-            <a:schemeClr val="accent1"/>
-          </a:fillRef>
-          <a:effectRef idx="2">
-            <a:schemeClr val="accent1"/>
-          </a:effectRef>
-          <a:fontRef idx="minor">
-            <a:schemeClr val="lt1"/>
-          </a:fontRef>
-        </p:style>
-        <p:txBody>
-          <a:bodyPr rtlCol="0" anchor="ctr"/>
-          <a:lstStyle/>
-          <a:p>
-            <a:pPr algn="ctr"/>
-          </a:p>
-        </p:txBody>
-      </p:sp>
-      <p:pic>
-        <p:nvPicPr>
-          <p:cNvPr id="46" name="Picture 45" descr="image13.png"/>
-          <p:cNvPicPr>
-            <a:picLocks noChangeAspect="1"/>
-          </p:cNvPicPr>
-          <p:nvPr/>
-        </p:nvPicPr>
-        <p:blipFill>
-          <a:blip r:embed="rId3">
-            <a:alphaModFix amt="62000"/>
-          </a:blip>
-          <a:stretch>
-            <a:fillRect/>
-          </a:stretch>
-        </p:blipFill>
-        <p:spPr>
-          <a:xfrm>
-            <a:off x="5376672" y="1298448"/>
-            <a:ext cx="3419856" cy="694944"/>
-          </a:xfrm>
-          <a:prstGeom prst="rect">
-            <a:avLst/>
-          </a:prstGeom>
-        </p:spPr>
-      </p:pic>
-      <p:sp>
-        <p:nvSpPr>
-          <p:cNvPr id="47" name="Rectangle 46"/>
-          <p:cNvSpPr/>
-          <p:nvPr/>
-        </p:nvSpPr>
-        <p:spPr>
-          <a:xfrm>
-            <a:off x="5376672" y="1298448"/>
-            <a:ext cx="3419856" cy="694944"/>
-          </a:xfrm>
-          <a:prstGeom prst="rect">
-            <a:avLst/>
-          </a:prstGeom>
-          <a:noFill/>
-          <a:ln w="9525">
-            <a:solidFill>
-              <a:srgbClr val="D5DFEE"/>
-            </a:solidFill>
-          </a:ln>
-          <a:effectLst/>
-        </p:spPr>
-        <p:style>
-          <a:lnRef idx="1">
-            <a:schemeClr val="accent1"/>
-          </a:lnRef>
-          <a:fillRef idx="3">
-            <a:schemeClr val="accent1"/>
-          </a:fillRef>
-          <a:effectRef idx="2">
-            <a:schemeClr val="accent1"/>
-          </a:effectRef>
-          <a:fontRef idx="minor">
-            <a:schemeClr val="lt1"/>
-          </a:fontRef>
-        </p:style>
-        <p:txBody>
-          <a:bodyPr rtlCol="0" anchor="ctr"/>
-          <a:lstStyle/>
-          <a:p>
-            <a:pPr algn="ctr"/>
-          </a:p>
-        </p:txBody>
-      </p:sp>
-      <p:sp>
-        <p:nvSpPr>
-          <p:cNvPr id="48" name="Rectangle 47"/>
-          <p:cNvSpPr/>
-          <p:nvPr/>
-        </p:nvSpPr>
-        <p:spPr>
-          <a:xfrm>
-            <a:off x="5376672" y="1755648"/>
-            <a:ext cx="3419856" cy="237744"/>
-          </a:xfrm>
-          <a:prstGeom prst="rect">
-            <a:avLst/>
-          </a:prstGeom>
-          <a:gradFill rotWithShape="1">
-            <a:gsLst>
-              <a:gs pos="0">
-                <a:srgbClr val="00366A"/>
-              </a:gs>
-              <a:gs pos="100000">
-                <a:srgbClr val="2E5FA0"/>
-              </a:gs>
-            </a:gsLst>
-            <a:lin ang="0" scaled="0"/>
-          </a:gradFill>
-          <a:ln>
-            <a:noFill/>
-          </a:ln>
-          <a:effectLst/>
-        </p:spPr>
-        <p:style>
-          <a:lnRef idx="1">
-            <a:schemeClr val="accent1"/>
-          </a:lnRef>
-          <a:fillRef idx="3">
-            <a:schemeClr val="accent1"/>
-          </a:fillRef>
-          <a:effectRef idx="2">
-            <a:schemeClr val="accent1"/>
-          </a:effectRef>
-          <a:fontRef idx="minor">
-            <a:schemeClr val="lt1"/>
-          </a:fontRef>
-        </p:style>
-        <p:txBody>
-          <a:bodyPr rtlCol="0" anchor="ctr"/>
-          <a:lstStyle/>
-          <a:p>
-            <a:pPr algn="ctr"/>
-          </a:p>
-        </p:txBody>
-      </p:sp>
-      <p:sp>
-        <p:nvSpPr>
-          <p:cNvPr id="49" name="TextBox 48"/>
-          <p:cNvSpPr txBox="1"/>
-          <p:nvPr/>
-        </p:nvSpPr>
-        <p:spPr>
-          <a:xfrm>
-            <a:off x="5486400" y="1783080"/>
-            <a:ext cx="3200400" cy="192024"/>
-          </a:xfrm>
-          <a:prstGeom prst="rect">
-            <a:avLst/>
-          </a:prstGeom>
-          <a:noFill/>
-        </p:spPr>
-        <p:txBody>
-          <a:bodyPr wrap="square" lIns="0" rIns="0" tIns="0" bIns="0">
-            <a:spAutoFit/>
-          </a:bodyPr>
-          <a:lstStyle/>
-          <a:p>
-            <a:pPr algn="l">
-              <a:lnSpc>
-                <a:spcPct val="115000"/>
-              </a:lnSpc>
-            </a:pPr>
-            <a:r>
-              <a:rPr sz="850" b="1">
-                <a:solidFill>
-                  <a:srgbClr val="FFFFFF"/>
-                </a:solidFill>
-                <a:latin typeface="微软雅黑"/>
-                <a:ea typeface="微软雅黑"/>
-                <a:cs typeface="微软雅黑"/>
-              </a:rPr>
-              <a:t>医药工业 4.0：数据驱动的智能工厂</a:t>
-            </a:r>
-          </a:p>
-        </p:txBody>
-      </p:sp>
-      <p:sp>
-        <p:nvSpPr>
-          <p:cNvPr id="50" name="TextBox 49"/>
-          <p:cNvSpPr txBox="1"/>
-          <p:nvPr/>
-        </p:nvSpPr>
-        <p:spPr>
-          <a:xfrm>
-            <a:off x="5376672" y="2084831"/>
-            <a:ext cx="1463040" cy="219456"/>
-          </a:xfrm>
-          <a:prstGeom prst="rect">
-            <a:avLst/>
-          </a:prstGeom>
-          <a:noFill/>
-        </p:spPr>
-        <p:txBody>
-          <a:bodyPr wrap="square" lIns="0" rIns="0" tIns="0" bIns="0">
-            <a:spAutoFit/>
-          </a:bodyPr>
-          <a:lstStyle/>
-          <a:p>
-            <a:pPr algn="l">
-              <a:lnSpc>
-                <a:spcPct val="115000"/>
-              </a:lnSpc>
-            </a:pPr>
-            <a:r>
-              <a:rPr sz="1200" b="1">
-                <a:solidFill>
-                  <a:srgbClr val="00366A"/>
-                </a:solidFill>
-                <a:latin typeface="微软雅黑"/>
-                <a:ea typeface="微软雅黑"/>
-                <a:cs typeface="微软雅黑"/>
-              </a:rPr>
-              <a:t>推进机制</a:t>
-            </a:r>
-          </a:p>
-        </p:txBody>
-      </p:sp>
-      <p:sp>
-        <p:nvSpPr>
-          <p:cNvPr id="51" name="Rectangle 50"/>
-          <p:cNvSpPr/>
-          <p:nvPr/>
-        </p:nvSpPr>
-        <p:spPr>
-          <a:xfrm>
-            <a:off x="5376672" y="2322576"/>
-            <a:ext cx="457200" cy="25603"/>
-          </a:xfrm>
-          <a:prstGeom prst="rect">
-            <a:avLst/>
-          </a:prstGeom>
-          <a:solidFill>
-            <a:srgbClr val="FF7E3D"/>
-          </a:solidFill>
-          <a:ln>
-            <a:noFill/>
-          </a:ln>
-          <a:effectLst/>
-        </p:spPr>
-        <p:style>
-          <a:lnRef idx="1">
-            <a:schemeClr val="accent1"/>
-          </a:lnRef>
-          <a:fillRef idx="3">
-            <a:schemeClr val="accent1"/>
-          </a:fillRef>
-          <a:effectRef idx="2">
-            <a:schemeClr val="accent1"/>
-          </a:effectRef>
-          <a:fontRef idx="minor">
-            <a:schemeClr val="lt1"/>
-          </a:fontRef>
-        </p:style>
-        <p:txBody>
-          <a:bodyPr rtlCol="0" anchor="ctr"/>
-          <a:lstStyle/>
-          <a:p>
-            <a:pPr algn="ctr"/>
-          </a:p>
-        </p:txBody>
-      </p:sp>
-      <p:sp>
-        <p:nvSpPr>
-          <p:cNvPr id="52" name="Rectangle 51"/>
-          <p:cNvSpPr/>
-          <p:nvPr/>
-        </p:nvSpPr>
-        <p:spPr>
-          <a:xfrm>
-            <a:off x="5376672" y="2414015"/>
-            <a:ext cx="3419856" cy="502920"/>
-          </a:xfrm>
-          <a:prstGeom prst="rect">
-            <a:avLst/>
-          </a:prstGeom>
-          <a:solidFill>
-            <a:srgbClr val="F7FAFE"/>
-          </a:solidFill>
-          <a:ln w="6350">
-            <a:solidFill>
-              <a:srgbClr val="D5DFEE"/>
-            </a:solidFill>
-          </a:ln>
-          <a:effectLst/>
-        </p:spPr>
-        <p:style>
-          <a:lnRef idx="1">
-            <a:schemeClr val="accent1"/>
-          </a:lnRef>
-          <a:fillRef idx="3">
-            <a:schemeClr val="accent1"/>
-          </a:fillRef>
-          <a:effectRef idx="2">
-            <a:schemeClr val="accent1"/>
-          </a:effectRef>
-          <a:fontRef idx="minor">
-            <a:schemeClr val="lt1"/>
-          </a:fontRef>
-        </p:style>
-        <p:txBody>
-          <a:bodyPr rtlCol="0" anchor="ctr"/>
-          <a:lstStyle/>
-          <a:p>
-            <a:pPr algn="ctr"/>
-          </a:p>
-        </p:txBody>
-      </p:sp>
-      <p:sp>
-        <p:nvSpPr>
-          <p:cNvPr id="53" name="Rectangle 52"/>
-          <p:cNvSpPr/>
-          <p:nvPr/>
-        </p:nvSpPr>
-        <p:spPr>
-          <a:xfrm>
-            <a:off x="5376672" y="2414015"/>
-            <a:ext cx="45720" cy="502920"/>
-          </a:xfrm>
-          <a:prstGeom prst="rect">
-            <a:avLst/>
-          </a:prstGeom>
-          <a:solidFill>
-            <a:srgbClr val="3263A7"/>
-          </a:solidFill>
-          <a:ln>
-            <a:noFill/>
-          </a:ln>
-          <a:effectLst/>
-        </p:spPr>
-        <p:style>
-          <a:lnRef idx="1">
-            <a:schemeClr val="accent1"/>
-          </a:lnRef>
-          <a:fillRef idx="3">
-            <a:schemeClr val="accent1"/>
-          </a:fillRef>
-          <a:effectRef idx="2">
-            <a:schemeClr val="accent1"/>
-          </a:effectRef>
-          <a:fontRef idx="minor">
-            <a:schemeClr val="lt1"/>
-          </a:fontRef>
-        </p:style>
-        <p:txBody>
-          <a:bodyPr rtlCol="0" anchor="ctr"/>
-          <a:lstStyle/>
-          <a:p>
-            <a:pPr algn="ctr"/>
-          </a:p>
-        </p:txBody>
-      </p:sp>
-      <p:sp>
-        <p:nvSpPr>
-          <p:cNvPr id="54" name="TextBox 53"/>
-          <p:cNvSpPr txBox="1"/>
-          <p:nvPr/>
-        </p:nvSpPr>
-        <p:spPr>
-          <a:xfrm>
-            <a:off x="5495544" y="2455163"/>
-            <a:ext cx="292608" cy="182880"/>
-          </a:xfrm>
-          <a:prstGeom prst="rect">
-            <a:avLst/>
-          </a:prstGeom>
-          <a:noFill/>
-        </p:spPr>
-        <p:txBody>
-          <a:bodyPr wrap="square" lIns="0" rIns="0" tIns="0" bIns="0">
-            <a:spAutoFit/>
-          </a:bodyPr>
-          <a:lstStyle/>
-          <a:p>
-            <a:pPr algn="l">
-              <a:lnSpc>
-                <a:spcPct val="115000"/>
-              </a:lnSpc>
-            </a:pPr>
-            <a:r>
-              <a:rPr sz="900" b="1">
-                <a:solidFill>
-                  <a:srgbClr val="FF7E3D"/>
-                </a:solidFill>
-                <a:latin typeface="Arial"/>
-                <a:ea typeface="微软雅黑"/>
-                <a:cs typeface="微软雅黑"/>
-              </a:rPr>
-              <a:t>01</a:t>
-            </a:r>
-          </a:p>
-        </p:txBody>
-      </p:sp>
-      <p:sp>
-        <p:nvSpPr>
-          <p:cNvPr id="55" name="TextBox 54"/>
-          <p:cNvSpPr txBox="1"/>
-          <p:nvPr/>
-        </p:nvSpPr>
-        <p:spPr>
-          <a:xfrm>
-            <a:off x="5797296" y="2450591"/>
-            <a:ext cx="2889504" cy="192024"/>
-          </a:xfrm>
-          <a:prstGeom prst="rect">
-            <a:avLst/>
-          </a:prstGeom>
-          <a:noFill/>
-        </p:spPr>
-        <p:txBody>
-          <a:bodyPr wrap="square" lIns="0" rIns="0" tIns="0" bIns="0">
-            <a:spAutoFit/>
-          </a:bodyPr>
-          <a:lstStyle/>
-          <a:p>
-            <a:pPr algn="l">
-              <a:lnSpc>
-                <a:spcPct val="115000"/>
-              </a:lnSpc>
-            </a:pPr>
-            <a:r>
-              <a:rPr sz="880" b="1">
-                <a:solidFill>
-                  <a:srgbClr val="00366A"/>
-                </a:solidFill>
-                <a:latin typeface="微软雅黑"/>
-                <a:ea typeface="微软雅黑"/>
-                <a:cs typeface="微软雅黑"/>
-              </a:rPr>
-              <a:t>自主主导 + 组合外采</a:t>
-            </a:r>
-          </a:p>
-        </p:txBody>
-      </p:sp>
-      <p:sp>
-        <p:nvSpPr>
-          <p:cNvPr id="56" name="TextBox 55"/>
-          <p:cNvSpPr txBox="1"/>
-          <p:nvPr/>
-        </p:nvSpPr>
-        <p:spPr>
-          <a:xfrm>
-            <a:off x="5797296" y="2651759"/>
-            <a:ext cx="2871216" cy="237744"/>
-          </a:xfrm>
-          <a:prstGeom prst="rect">
-            <a:avLst/>
-          </a:prstGeom>
-          <a:noFill/>
-        </p:spPr>
-        <p:txBody>
-          <a:bodyPr wrap="square" lIns="0" rIns="0" tIns="0" bIns="0">
-            <a:spAutoFit/>
-          </a:bodyPr>
-          <a:lstStyle/>
-          <a:p>
-            <a:pPr algn="l">
-              <a:lnSpc>
-                <a:spcPct val="110000"/>
-              </a:lnSpc>
-            </a:pPr>
-            <a:r>
-              <a:rPr sz="710" b="0">
-                <a:solidFill>
-                  <a:srgbClr val="6B7A90"/>
-                </a:solidFill>
-                <a:latin typeface="微软雅黑"/>
-                <a:ea typeface="微软雅黑"/>
-                <a:cs typeface="微软雅黑"/>
-              </a:rPr>
-              <a:t>底座与知识资产自建自持；算法、工具按场景择优组合</a:t>
-            </a:r>
-          </a:p>
-        </p:txBody>
-      </p:sp>
-      <p:sp>
-        <p:nvSpPr>
-          <p:cNvPr id="57" name="Rectangle 56"/>
-          <p:cNvSpPr/>
-          <p:nvPr/>
-        </p:nvSpPr>
-        <p:spPr>
-          <a:xfrm>
-            <a:off x="5376672" y="2976372"/>
-            <a:ext cx="3419856" cy="502920"/>
-          </a:xfrm>
-          <a:prstGeom prst="rect">
-            <a:avLst/>
-          </a:prstGeom>
-          <a:solidFill>
-            <a:srgbClr val="F7FAFE"/>
-          </a:solidFill>
-          <a:ln w="6350">
-            <a:solidFill>
-              <a:srgbClr val="D5DFEE"/>
-            </a:solidFill>
-          </a:ln>
-          <a:effectLst/>
-        </p:spPr>
-        <p:style>
-          <a:lnRef idx="1">
-            <a:schemeClr val="accent1"/>
-          </a:lnRef>
-          <a:fillRef idx="3">
-            <a:schemeClr val="accent1"/>
-          </a:fillRef>
-          <a:effectRef idx="2">
-            <a:schemeClr val="accent1"/>
-          </a:effectRef>
-          <a:fontRef idx="minor">
-            <a:schemeClr val="lt1"/>
-          </a:fontRef>
-        </p:style>
-        <p:txBody>
-          <a:bodyPr rtlCol="0" anchor="ctr"/>
-          <a:lstStyle/>
-          <a:p>
-            <a:pPr algn="ctr"/>
-          </a:p>
-        </p:txBody>
-      </p:sp>
-      <p:sp>
-        <p:nvSpPr>
-          <p:cNvPr id="58" name="Rectangle 57"/>
-          <p:cNvSpPr/>
-          <p:nvPr/>
-        </p:nvSpPr>
-        <p:spPr>
-          <a:xfrm>
-            <a:off x="5376672" y="2976372"/>
-            <a:ext cx="45720" cy="502920"/>
-          </a:xfrm>
-          <a:prstGeom prst="rect">
-            <a:avLst/>
-          </a:prstGeom>
-          <a:solidFill>
-            <a:srgbClr val="3263A7"/>
-          </a:solidFill>
-          <a:ln>
-            <a:noFill/>
-          </a:ln>
-          <a:effectLst/>
-        </p:spPr>
-        <p:style>
-          <a:lnRef idx="1">
-            <a:schemeClr val="accent1"/>
-          </a:lnRef>
-          <a:fillRef idx="3">
-            <a:schemeClr val="accent1"/>
-          </a:fillRef>
-          <a:effectRef idx="2">
-            <a:schemeClr val="accent1"/>
-          </a:effectRef>
-          <a:fontRef idx="minor">
-            <a:schemeClr val="lt1"/>
-          </a:fontRef>
-        </p:style>
-        <p:txBody>
-          <a:bodyPr rtlCol="0" anchor="ctr"/>
-          <a:lstStyle/>
-          <a:p>
-            <a:pPr algn="ctr"/>
-          </a:p>
-        </p:txBody>
-      </p:sp>
-      <p:sp>
-        <p:nvSpPr>
-          <p:cNvPr id="59" name="TextBox 58"/>
-          <p:cNvSpPr txBox="1"/>
-          <p:nvPr/>
-        </p:nvSpPr>
-        <p:spPr>
-          <a:xfrm>
-            <a:off x="5495544" y="3017520"/>
-            <a:ext cx="292608" cy="182880"/>
-          </a:xfrm>
-          <a:prstGeom prst="rect">
-            <a:avLst/>
-          </a:prstGeom>
-          <a:noFill/>
-        </p:spPr>
-        <p:txBody>
-          <a:bodyPr wrap="square" lIns="0" rIns="0" tIns="0" bIns="0">
-            <a:spAutoFit/>
-          </a:bodyPr>
-          <a:lstStyle/>
-          <a:p>
-            <a:pPr algn="l">
-              <a:lnSpc>
-                <a:spcPct val="115000"/>
-              </a:lnSpc>
-            </a:pPr>
-            <a:r>
-              <a:rPr sz="900" b="1">
-                <a:solidFill>
-                  <a:srgbClr val="FF7E3D"/>
-                </a:solidFill>
-                <a:latin typeface="Arial"/>
-                <a:ea typeface="微软雅黑"/>
-                <a:cs typeface="微软雅黑"/>
-              </a:rPr>
-              <a:t>02</a:t>
-            </a:r>
-          </a:p>
-        </p:txBody>
-      </p:sp>
-      <p:sp>
-        <p:nvSpPr>
-          <p:cNvPr id="60" name="TextBox 59"/>
-          <p:cNvSpPr txBox="1"/>
-          <p:nvPr/>
-        </p:nvSpPr>
-        <p:spPr>
-          <a:xfrm>
-            <a:off x="5797296" y="3012948"/>
-            <a:ext cx="2889504" cy="192024"/>
-          </a:xfrm>
-          <a:prstGeom prst="rect">
-            <a:avLst/>
-          </a:prstGeom>
-          <a:noFill/>
-        </p:spPr>
-        <p:txBody>
-          <a:bodyPr wrap="square" lIns="0" rIns="0" tIns="0" bIns="0">
-            <a:spAutoFit/>
-          </a:bodyPr>
-          <a:lstStyle/>
-          <a:p>
-            <a:pPr algn="l">
-              <a:lnSpc>
-                <a:spcPct val="115000"/>
-              </a:lnSpc>
-            </a:pPr>
-            <a:r>
-              <a:rPr sz="880" b="1">
-                <a:solidFill>
-                  <a:srgbClr val="00366A"/>
-                </a:solidFill>
-                <a:latin typeface="微软雅黑"/>
-                <a:ea typeface="微软雅黑"/>
-                <a:cs typeface="微软雅黑"/>
-              </a:rPr>
-              <a:t>双轨并行：快赢 + 长跑</a:t>
-            </a:r>
-          </a:p>
-        </p:txBody>
-      </p:sp>
-      <p:sp>
-        <p:nvSpPr>
-          <p:cNvPr id="61" name="TextBox 60"/>
-          <p:cNvSpPr txBox="1"/>
-          <p:nvPr/>
-        </p:nvSpPr>
-        <p:spPr>
-          <a:xfrm>
-            <a:off x="5797296" y="3214115"/>
-            <a:ext cx="2871216" cy="237744"/>
-          </a:xfrm>
-          <a:prstGeom prst="rect">
-            <a:avLst/>
-          </a:prstGeom>
-          <a:noFill/>
-        </p:spPr>
-        <p:txBody>
-          <a:bodyPr wrap="square" lIns="0" rIns="0" tIns="0" bIns="0">
-            <a:spAutoFit/>
-          </a:bodyPr>
-          <a:lstStyle/>
-          <a:p>
-            <a:pPr algn="l">
-              <a:lnSpc>
-                <a:spcPct val="110000"/>
-              </a:lnSpc>
-            </a:pPr>
-            <a:r>
-              <a:rPr sz="710" b="0">
-                <a:solidFill>
-                  <a:srgbClr val="6B7A90"/>
-                </a:solidFill>
-                <a:latin typeface="微软雅黑"/>
-                <a:ea typeface="微软雅黑"/>
-                <a:cs typeface="微软雅黑"/>
-              </a:rPr>
-              <a:t>短周期方向季度出实证；强监管方向按合规节奏推进</a:t>
-            </a:r>
-          </a:p>
-        </p:txBody>
-      </p:sp>
-      <p:sp>
-        <p:nvSpPr>
-          <p:cNvPr id="62" name="Rectangle 61"/>
-          <p:cNvSpPr/>
-          <p:nvPr/>
-        </p:nvSpPr>
-        <p:spPr>
-          <a:xfrm>
-            <a:off x="5376672" y="3538728"/>
-            <a:ext cx="3419856" cy="502920"/>
-          </a:xfrm>
-          <a:prstGeom prst="rect">
-            <a:avLst/>
-          </a:prstGeom>
-          <a:solidFill>
-            <a:srgbClr val="F7FAFE"/>
-          </a:solidFill>
-          <a:ln w="6350">
-            <a:solidFill>
-              <a:srgbClr val="D5DFEE"/>
-            </a:solidFill>
-          </a:ln>
-          <a:effectLst/>
-        </p:spPr>
-        <p:style>
-          <a:lnRef idx="1">
-            <a:schemeClr val="accent1"/>
-          </a:lnRef>
-          <a:fillRef idx="3">
-            <a:schemeClr val="accent1"/>
-          </a:fillRef>
-          <a:effectRef idx="2">
-            <a:schemeClr val="accent1"/>
-          </a:effectRef>
-          <a:fontRef idx="minor">
-            <a:schemeClr val="lt1"/>
-          </a:fontRef>
-        </p:style>
-        <p:txBody>
-          <a:bodyPr rtlCol="0" anchor="ctr"/>
-          <a:lstStyle/>
-          <a:p>
-            <a:pPr algn="ctr"/>
-          </a:p>
-        </p:txBody>
-      </p:sp>
-      <p:sp>
-        <p:nvSpPr>
-          <p:cNvPr id="63" name="Rectangle 62"/>
-          <p:cNvSpPr/>
-          <p:nvPr/>
-        </p:nvSpPr>
-        <p:spPr>
-          <a:xfrm>
-            <a:off x="5376672" y="3538728"/>
-            <a:ext cx="45720" cy="502920"/>
-          </a:xfrm>
-          <a:prstGeom prst="rect">
-            <a:avLst/>
-          </a:prstGeom>
-          <a:solidFill>
-            <a:srgbClr val="3263A7"/>
-          </a:solidFill>
-          <a:ln>
-            <a:noFill/>
-          </a:ln>
-          <a:effectLst/>
-        </p:spPr>
-        <p:style>
-          <a:lnRef idx="1">
-            <a:schemeClr val="accent1"/>
-          </a:lnRef>
-          <a:fillRef idx="3">
-            <a:schemeClr val="accent1"/>
-          </a:fillRef>
-          <a:effectRef idx="2">
-            <a:schemeClr val="accent1"/>
-          </a:effectRef>
-          <a:fontRef idx="minor">
-            <a:schemeClr val="lt1"/>
-          </a:fontRef>
-        </p:style>
-        <p:txBody>
-          <a:bodyPr rtlCol="0" anchor="ctr"/>
-          <a:lstStyle/>
-          <a:p>
-            <a:pPr algn="ctr"/>
-          </a:p>
-        </p:txBody>
-      </p:sp>
-      <p:sp>
-        <p:nvSpPr>
-          <p:cNvPr id="64" name="TextBox 63"/>
-          <p:cNvSpPr txBox="1"/>
-          <p:nvPr/>
-        </p:nvSpPr>
-        <p:spPr>
-          <a:xfrm>
-            <a:off x="5495544" y="3579876"/>
-            <a:ext cx="292608" cy="182880"/>
-          </a:xfrm>
-          <a:prstGeom prst="rect">
-            <a:avLst/>
-          </a:prstGeom>
-          <a:noFill/>
-        </p:spPr>
-        <p:txBody>
-          <a:bodyPr wrap="square" lIns="0" rIns="0" tIns="0" bIns="0">
-            <a:spAutoFit/>
-          </a:bodyPr>
-          <a:lstStyle/>
-          <a:p>
-            <a:pPr algn="l">
-              <a:lnSpc>
-                <a:spcPct val="115000"/>
-              </a:lnSpc>
-            </a:pPr>
-            <a:r>
-              <a:rPr sz="900" b="1">
-                <a:solidFill>
-                  <a:srgbClr val="FF7E3D"/>
-                </a:solidFill>
-                <a:latin typeface="Arial"/>
-                <a:ea typeface="微软雅黑"/>
-                <a:cs typeface="微软雅黑"/>
-              </a:rPr>
-              <a:t>03</a:t>
-            </a:r>
-          </a:p>
-        </p:txBody>
-      </p:sp>
-      <p:sp>
-        <p:nvSpPr>
-          <p:cNvPr id="65" name="TextBox 64"/>
-          <p:cNvSpPr txBox="1"/>
-          <p:nvPr/>
-        </p:nvSpPr>
-        <p:spPr>
-          <a:xfrm>
-            <a:off x="5797296" y="3575304"/>
-            <a:ext cx="2889504" cy="192024"/>
-          </a:xfrm>
-          <a:prstGeom prst="rect">
-            <a:avLst/>
-          </a:prstGeom>
-          <a:noFill/>
-        </p:spPr>
-        <p:txBody>
-          <a:bodyPr wrap="square" lIns="0" rIns="0" tIns="0" bIns="0">
-            <a:spAutoFit/>
-          </a:bodyPr>
-          <a:lstStyle/>
-          <a:p>
-            <a:pPr algn="l">
-              <a:lnSpc>
-                <a:spcPct val="115000"/>
-              </a:lnSpc>
-            </a:pPr>
-            <a:r>
-              <a:rPr sz="880" b="1">
-                <a:solidFill>
-                  <a:srgbClr val="00366A"/>
-                </a:solidFill>
-                <a:latin typeface="微软雅黑"/>
-                <a:ea typeface="微软雅黑"/>
-                <a:cs typeface="微软雅黑"/>
-              </a:rPr>
-              <a:t>单点突破：设备预测性维护</a:t>
-            </a:r>
-          </a:p>
-        </p:txBody>
-      </p:sp>
-      <p:sp>
-        <p:nvSpPr>
-          <p:cNvPr id="66" name="TextBox 65"/>
-          <p:cNvSpPr txBox="1"/>
-          <p:nvPr/>
-        </p:nvSpPr>
-        <p:spPr>
-          <a:xfrm>
-            <a:off x="5797296" y="3776472"/>
-            <a:ext cx="2871216" cy="237744"/>
-          </a:xfrm>
-          <a:prstGeom prst="rect">
-            <a:avLst/>
-          </a:prstGeom>
-          <a:noFill/>
-        </p:spPr>
-        <p:txBody>
-          <a:bodyPr wrap="square" lIns="0" rIns="0" tIns="0" bIns="0">
-            <a:spAutoFit/>
-          </a:bodyPr>
-          <a:lstStyle/>
-          <a:p>
-            <a:pPr algn="l">
-              <a:lnSpc>
-                <a:spcPct val="110000"/>
-              </a:lnSpc>
-            </a:pPr>
-            <a:r>
-              <a:rPr sz="710" b="0">
-                <a:solidFill>
-                  <a:srgbClr val="6B7A90"/>
-                </a:solidFill>
-                <a:latin typeface="微软雅黑"/>
-                <a:ea typeface="微软雅黑"/>
-                <a:cs typeface="微软雅黑"/>
-              </a:rPr>
-              <a:t>以动力站关键设备切入，跑通数据到决策完整闭环</a:t>
-            </a:r>
-          </a:p>
-        </p:txBody>
-      </p:sp>
-      <p:sp>
-        <p:nvSpPr>
-          <p:cNvPr id="67" name="Rectangle 66"/>
-          <p:cNvSpPr/>
-          <p:nvPr/>
-        </p:nvSpPr>
-        <p:spPr>
-          <a:xfrm>
-            <a:off x="347472" y="4059936"/>
-            <a:ext cx="8449056" cy="25603"/>
-          </a:xfrm>
-          <a:prstGeom prst="rect">
-            <a:avLst/>
-          </a:prstGeom>
-          <a:solidFill>
-            <a:srgbClr val="D5DFEE"/>
-          </a:solidFill>
-          <a:ln>
-            <a:noFill/>
-          </a:ln>
-          <a:effectLst/>
-        </p:spPr>
-        <p:style>
-          <a:lnRef idx="1">
-            <a:schemeClr val="accent1"/>
-          </a:lnRef>
-          <a:fillRef idx="3">
-            <a:schemeClr val="accent1"/>
-          </a:fillRef>
-          <a:effectRef idx="2">
-            <a:schemeClr val="accent1"/>
-          </a:effectRef>
-          <a:fontRef idx="minor">
-            <a:schemeClr val="lt1"/>
-          </a:fontRef>
-        </p:style>
-        <p:txBody>
-          <a:bodyPr rtlCol="0" anchor="ctr"/>
-          <a:lstStyle/>
-          <a:p>
-            <a:pPr algn="ctr"/>
-          </a:p>
-        </p:txBody>
-      </p:sp>
-      <p:sp>
-        <p:nvSpPr>
-          <p:cNvPr id="68" name="Oval 67"/>
-          <p:cNvSpPr/>
-          <p:nvPr/>
-        </p:nvSpPr>
-        <p:spPr>
-          <a:xfrm>
-            <a:off x="347472" y="4005072"/>
-            <a:ext cx="109728" cy="109728"/>
+            <a:off x="347472" y="4178808"/>
+            <a:ext cx="91440" cy="91440"/>
           </a:xfrm>
           <a:prstGeom prst="ellipse">
             <a:avLst/>
@@ -5954,14 +6934,14 @@
       </p:sp>
       <p:sp>
         <p:nvSpPr>
-          <p:cNvPr id="69" name="TextBox 68"/>
+          <p:cNvPr id="88" name="TextBox 87"/>
           <p:cNvSpPr txBox="1"/>
           <p:nvPr/>
         </p:nvSpPr>
         <p:spPr>
           <a:xfrm>
-            <a:off x="530352" y="4151376"/>
-            <a:ext cx="1005840" cy="219456"/>
+            <a:off x="502920" y="4293108"/>
+            <a:ext cx="1005840" cy="182880"/>
           </a:xfrm>
           <a:prstGeom prst="rect">
             <a:avLst/>
@@ -5976,11 +6956,11 @@
           <a:p>
             <a:pPr algn="l">
               <a:lnSpc>
-                <a:spcPct val="115000"/>
+                <a:spcPct val="112000"/>
               </a:lnSpc>
             </a:pPr>
             <a:r>
-              <a:rPr sz="1150" b="1">
+              <a:rPr sz="1050" b="1">
                 <a:solidFill>
                   <a:srgbClr val="00366A"/>
                 </a:solidFill>
@@ -5995,14 +6975,14 @@
       </p:sp>
       <p:sp>
         <p:nvSpPr>
-          <p:cNvPr id="70" name="TextBox 69"/>
+          <p:cNvPr id="89" name="TextBox 88"/>
           <p:cNvSpPr txBox="1"/>
           <p:nvPr/>
         </p:nvSpPr>
         <p:spPr>
           <a:xfrm>
-            <a:off x="530352" y="4398264"/>
-            <a:ext cx="2542032" cy="219456"/>
+            <a:off x="502920" y="4485132"/>
+            <a:ext cx="2542032" cy="182880"/>
           </a:xfrm>
           <a:prstGeom prst="rect">
             <a:avLst/>
@@ -6017,7 +6997,7 @@
           <a:p>
             <a:pPr algn="l">
               <a:lnSpc>
-                <a:spcPct val="115000"/>
+                <a:spcPct val="112000"/>
               </a:lnSpc>
             </a:pPr>
             <a:r>
@@ -6036,14 +7016,14 @@
       </p:sp>
       <p:sp>
         <p:nvSpPr>
-          <p:cNvPr id="71" name="TextBox 70"/>
+          <p:cNvPr id="90" name="TextBox 89"/>
           <p:cNvSpPr txBox="1"/>
           <p:nvPr/>
         </p:nvSpPr>
         <p:spPr>
           <a:xfrm>
-            <a:off x="530352" y="4626864"/>
-            <a:ext cx="2542032" cy="219456"/>
+            <a:off x="502920" y="4686300"/>
+            <a:ext cx="2542032" cy="182880"/>
           </a:xfrm>
           <a:prstGeom prst="rect">
             <a:avLst/>
@@ -6058,13 +7038,13 @@
           <a:p>
             <a:pPr algn="l">
               <a:lnSpc>
-                <a:spcPct val="115000"/>
+                <a:spcPct val="112000"/>
               </a:lnSpc>
             </a:pPr>
             <a:r>
               <a:rPr sz="760" b="0">
                 <a:solidFill>
-                  <a:srgbClr val="6B7A90"/>
+                  <a:srgbClr val="606E84"/>
                 </a:solidFill>
                 <a:latin typeface="微软雅黑"/>
                 <a:ea typeface="微软雅黑"/>
@@ -6077,14 +7057,14 @@
       </p:sp>
       <p:sp>
         <p:nvSpPr>
-          <p:cNvPr id="72" name="Oval 71"/>
+          <p:cNvPr id="91" name="Oval 90"/>
           <p:cNvSpPr/>
           <p:nvPr/>
         </p:nvSpPr>
         <p:spPr>
           <a:xfrm>
-            <a:off x="3163824" y="4005072"/>
-            <a:ext cx="109728" cy="109728"/>
+            <a:off x="3163823" y="4178808"/>
+            <a:ext cx="91440" cy="91440"/>
           </a:xfrm>
           <a:prstGeom prst="ellipse">
             <a:avLst/>
@@ -6121,14 +7101,14 @@
       </p:sp>
       <p:sp>
         <p:nvSpPr>
-          <p:cNvPr id="73" name="TextBox 72"/>
+          <p:cNvPr id="92" name="TextBox 91"/>
           <p:cNvSpPr txBox="1"/>
           <p:nvPr/>
         </p:nvSpPr>
         <p:spPr>
           <a:xfrm>
-            <a:off x="3346704" y="4151376"/>
-            <a:ext cx="1005840" cy="219456"/>
+            <a:off x="3319271" y="4293108"/>
+            <a:ext cx="1005840" cy="182880"/>
           </a:xfrm>
           <a:prstGeom prst="rect">
             <a:avLst/>
@@ -6143,11 +7123,11 @@
           <a:p>
             <a:pPr algn="l">
               <a:lnSpc>
-                <a:spcPct val="115000"/>
+                <a:spcPct val="112000"/>
               </a:lnSpc>
             </a:pPr>
             <a:r>
-              <a:rPr sz="1150" b="1">
+              <a:rPr sz="1050" b="1">
                 <a:solidFill>
                   <a:srgbClr val="2E5FA0"/>
                 </a:solidFill>
@@ -6162,14 +7142,14 @@
       </p:sp>
       <p:sp>
         <p:nvSpPr>
-          <p:cNvPr id="74" name="TextBox 73"/>
+          <p:cNvPr id="93" name="TextBox 92"/>
           <p:cNvSpPr txBox="1"/>
           <p:nvPr/>
         </p:nvSpPr>
         <p:spPr>
           <a:xfrm>
-            <a:off x="3346704" y="4398264"/>
-            <a:ext cx="2542032" cy="219456"/>
+            <a:off x="3319271" y="4485132"/>
+            <a:ext cx="2542032" cy="182880"/>
           </a:xfrm>
           <a:prstGeom prst="rect">
             <a:avLst/>
@@ -6184,7 +7164,7 @@
           <a:p>
             <a:pPr algn="l">
               <a:lnSpc>
-                <a:spcPct val="115000"/>
+                <a:spcPct val="112000"/>
               </a:lnSpc>
             </a:pPr>
             <a:r>
@@ -6203,14 +7183,14 @@
       </p:sp>
       <p:sp>
         <p:nvSpPr>
-          <p:cNvPr id="75" name="TextBox 74"/>
+          <p:cNvPr id="94" name="TextBox 93"/>
           <p:cNvSpPr txBox="1"/>
           <p:nvPr/>
         </p:nvSpPr>
         <p:spPr>
           <a:xfrm>
-            <a:off x="3346704" y="4626864"/>
-            <a:ext cx="2542032" cy="219456"/>
+            <a:off x="3319271" y="4686300"/>
+            <a:ext cx="2542032" cy="182880"/>
           </a:xfrm>
           <a:prstGeom prst="rect">
             <a:avLst/>
@@ -6225,33 +7205,33 @@
           <a:p>
             <a:pPr algn="l">
               <a:lnSpc>
-                <a:spcPct val="115000"/>
+                <a:spcPct val="112000"/>
               </a:lnSpc>
             </a:pPr>
             <a:r>
               <a:rPr sz="760" b="0">
                 <a:solidFill>
-                  <a:srgbClr val="6B7A90"/>
+                  <a:srgbClr val="606E84"/>
                 </a:solidFill>
                 <a:latin typeface="微软雅黑"/>
                 <a:ea typeface="微软雅黑"/>
                 <a:cs typeface="微软雅黑"/>
               </a:rPr>
-              <a:t>成熟场景跨厂区复制，供应商组合定型</a:t>
-            </a:r>
-          </a:p>
-        </p:txBody>
-      </p:sp>
-      <p:sp>
-        <p:nvSpPr>
-          <p:cNvPr id="76" name="Oval 75"/>
+              <a:t>成熟场景跨厂区复制，能力沉淀</a:t>
+            </a:r>
+          </a:p>
+        </p:txBody>
+      </p:sp>
+      <p:sp>
+        <p:nvSpPr>
+          <p:cNvPr id="95" name="Oval 94"/>
           <p:cNvSpPr/>
           <p:nvPr/>
         </p:nvSpPr>
         <p:spPr>
           <a:xfrm>
-            <a:off x="5980176" y="4005072"/>
-            <a:ext cx="109728" cy="109728"/>
+            <a:off x="5980175" y="4178808"/>
+            <a:ext cx="91440" cy="91440"/>
           </a:xfrm>
           <a:prstGeom prst="ellipse">
             <a:avLst/>
@@ -6288,14 +7268,14 @@
       </p:sp>
       <p:sp>
         <p:nvSpPr>
-          <p:cNvPr id="77" name="TextBox 76"/>
+          <p:cNvPr id="96" name="TextBox 95"/>
           <p:cNvSpPr txBox="1"/>
           <p:nvPr/>
         </p:nvSpPr>
         <p:spPr>
           <a:xfrm>
-            <a:off x="6163056" y="4151376"/>
-            <a:ext cx="1005840" cy="219456"/>
+            <a:off x="6135623" y="4293108"/>
+            <a:ext cx="1005840" cy="182880"/>
           </a:xfrm>
           <a:prstGeom prst="rect">
             <a:avLst/>
@@ -6310,11 +7290,11 @@
           <a:p>
             <a:pPr algn="l">
               <a:lnSpc>
-                <a:spcPct val="115000"/>
+                <a:spcPct val="112000"/>
               </a:lnSpc>
             </a:pPr>
             <a:r>
-              <a:rPr sz="1150" b="1">
+              <a:rPr sz="1050" b="1">
                 <a:solidFill>
                   <a:srgbClr val="FF7E3D"/>
                 </a:solidFill>
@@ -6329,14 +7309,14 @@
       </p:sp>
       <p:sp>
         <p:nvSpPr>
-          <p:cNvPr id="78" name="TextBox 77"/>
+          <p:cNvPr id="97" name="TextBox 96"/>
           <p:cNvSpPr txBox="1"/>
           <p:nvPr/>
         </p:nvSpPr>
         <p:spPr>
           <a:xfrm>
-            <a:off x="6163056" y="4398264"/>
-            <a:ext cx="2542032" cy="219456"/>
+            <a:off x="6135623" y="4485132"/>
+            <a:ext cx="2542032" cy="182880"/>
           </a:xfrm>
           <a:prstGeom prst="rect">
             <a:avLst/>
@@ -6351,7 +7331,7 @@
           <a:p>
             <a:pPr algn="l">
               <a:lnSpc>
-                <a:spcPct val="115000"/>
+                <a:spcPct val="112000"/>
               </a:lnSpc>
             </a:pPr>
             <a:r>
@@ -6370,14 +7350,14 @@
       </p:sp>
       <p:sp>
         <p:nvSpPr>
-          <p:cNvPr id="79" name="TextBox 78"/>
+          <p:cNvPr id="98" name="TextBox 97"/>
           <p:cNvSpPr txBox="1"/>
           <p:nvPr/>
         </p:nvSpPr>
         <p:spPr>
           <a:xfrm>
-            <a:off x="6163056" y="4626864"/>
-            <a:ext cx="2542032" cy="219456"/>
+            <a:off x="6135623" y="4686300"/>
+            <a:ext cx="2542032" cy="182880"/>
           </a:xfrm>
           <a:prstGeom prst="rect">
             <a:avLst/>
@@ -6392,33 +7372,33 @@
           <a:p>
             <a:pPr algn="l">
               <a:lnSpc>
-                <a:spcPct val="115000"/>
+                <a:spcPct val="112000"/>
               </a:lnSpc>
             </a:pPr>
             <a:r>
               <a:rPr sz="760" b="0">
                 <a:solidFill>
-                  <a:srgbClr val="6B7A90"/>
+                  <a:srgbClr val="606E84"/>
                 </a:solidFill>
                 <a:latin typeface="微软雅黑"/>
                 <a:ea typeface="微软雅黑"/>
                 <a:cs typeface="微软雅黑"/>
               </a:rPr>
-              <a:t>AI 原生运营模式 + 客户端价值输出</a:t>
-            </a:r>
-          </a:p>
-        </p:txBody>
-      </p:sp>
-      <p:sp>
-        <p:nvSpPr>
-          <p:cNvPr id="80" name="TextBox 79"/>
+              <a:t>AI 原生运营 + 客户端价值输出</a:t>
+            </a:r>
+          </a:p>
+        </p:txBody>
+      </p:sp>
+      <p:sp>
+        <p:nvSpPr>
+          <p:cNvPr id="99" name="TextBox 98"/>
           <p:cNvSpPr txBox="1"/>
           <p:nvPr/>
         </p:nvSpPr>
         <p:spPr>
           <a:xfrm>
-            <a:off x="-256032" y="4855464"/>
-            <a:ext cx="2130552" cy="246888"/>
+            <a:off x="146304" y="4988052"/>
+            <a:ext cx="1828800" cy="146304"/>
           </a:xfrm>
           <a:prstGeom prst="rect">
             <a:avLst/>
@@ -6433,11 +7413,11 @@
           <a:p>
             <a:pPr algn="l">
               <a:lnSpc>
-                <a:spcPct val="115000"/>
+                <a:spcPct val="112000"/>
               </a:lnSpc>
             </a:pPr>
             <a:r>
-              <a:rPr sz="750" b="0">
+              <a:rPr sz="650" b="0">
                 <a:solidFill>
                   <a:srgbClr val="FFFFFF"/>
                 </a:solidFill>
@@ -6452,14 +7432,14 @@
       </p:sp>
       <p:sp>
         <p:nvSpPr>
-          <p:cNvPr id="81" name="TextBox 80"/>
+          <p:cNvPr id="100" name="TextBox 99"/>
           <p:cNvSpPr txBox="1"/>
           <p:nvPr/>
         </p:nvSpPr>
         <p:spPr>
           <a:xfrm>
-            <a:off x="1014984" y="4873752"/>
-            <a:ext cx="2322576" cy="237744"/>
+            <a:off x="2103120" y="4988052"/>
+            <a:ext cx="2377440" cy="146304"/>
           </a:xfrm>
           <a:prstGeom prst="rect">
             <a:avLst/>
@@ -6474,11 +7454,11 @@
           <a:p>
             <a:pPr algn="l">
               <a:lnSpc>
-                <a:spcPct val="115000"/>
+                <a:spcPct val="112000"/>
               </a:lnSpc>
             </a:pPr>
             <a:r>
-              <a:rPr sz="700" b="0">
+              <a:rPr sz="650" b="0">
                 <a:solidFill>
                   <a:srgbClr val="FFFFFF"/>
                 </a:solidFill>
@@ -6493,14 +7473,14 @@
       </p:sp>
       <p:sp>
         <p:nvSpPr>
-          <p:cNvPr id="82" name="TextBox 81"/>
+          <p:cNvPr id="101" name="TextBox 100"/>
           <p:cNvSpPr txBox="1"/>
           <p:nvPr/>
         </p:nvSpPr>
         <p:spPr>
           <a:xfrm>
-            <a:off x="7571231" y="4873752"/>
-            <a:ext cx="2130552" cy="219456"/>
+            <a:off x="6949440" y="4988052"/>
+            <a:ext cx="2048256" cy="146304"/>
           </a:xfrm>
           <a:prstGeom prst="rect">
             <a:avLst/>
@@ -6513,13 +7493,13 @@
           </a:bodyPr>
           <a:lstStyle/>
           <a:p>
-            <a:pPr algn="l">
+            <a:pPr algn="r">
               <a:lnSpc>
-                <a:spcPct val="115000"/>
+                <a:spcPct val="112000"/>
               </a:lnSpc>
             </a:pPr>
             <a:r>
-              <a:rPr sz="600" b="0">
+              <a:rPr sz="650" b="0">
                 <a:solidFill>
                   <a:srgbClr val="FFFFFF"/>
                 </a:solidFill>
